--- a/docs/apresentacoes/01-modelagem-de-dados.pptx
+++ b/docs/apresentacoes/01-modelagem-de-dados.pptx
@@ -118,14 +118,14 @@
   <p:extLst>
     <p:ext uri="{521415D9-36F7-43E2-AB2F-B90AF26B5E84}">
       <p14:sectionLst xmlns:p14="http://schemas.microsoft.com/office/powerpoint/2010/main">
-        <p14:section name="Abertura" id="{d6ad0c1e-6476-9433-be02-806a19c1ae2e}">
+        <p14:section name="Abertura" id="{ea4782b8-12e0-52d5-db7f-4cebf5ca5e7f}">
           <p14:sldIdLst>
             <p14:sldId id="256"/>
             <p14:sldId id="257"/>
             <p14:sldId id="258"/>
           </p14:sldIdLst>
         </p14:section>
-        <p14:section name="Estrutura" id="{da89921e-4471-621a-2006-030a64c0ad4c}">
+        <p14:section name="Estrutura" id="{595c6dc3-da62-f592-bd01-54ab87797e7d}">
           <p14:sldIdLst>
             <p14:sldId id="259"/>
             <p14:sldId id="260"/>
@@ -134,14 +134,14 @@
             <p14:sldId id="263"/>
           </p14:sldIdLst>
         </p14:section>
-        <p14:section name="Draft e integridade" id="{f5a6c2dd-2313-f498-b28f-1788d79ce58d}">
+        <p14:section name="Draft e integridade" id="{47d78d52-1bd0-98e7-94ec-3bcff4bcc196}">
           <p14:sldIdLst>
             <p14:sldId id="264"/>
             <p14:sldId id="265"/>
             <p14:sldId id="266"/>
           </p14:sldIdLst>
         </p14:section>
-        <p14:section name="Encerramento" id="{f4cf8b23-9343-a1a6-f79e-2251b7ba294f}">
+        <p14:section name="Encerramento" id="{45559ad1-1764-e517-4618-bba52d766df4}">
           <p14:sldIdLst>
             <p14:sldId id="267"/>
           </p14:sldIdLst>
@@ -12820,7 +12820,7 @@
       </p:sp>
       <p:sp>
         <p:nvSpPr>
-          <p:cNvPr id="5" name="Código"/>
+          <p:cNvPr id="5" name="Editor"/>
           <p:cNvSpPr/>
           <p:nvPr/>
         </p:nvSpPr>
@@ -12835,9 +12835,14 @@
             </a:avLst>
           </a:prstGeom>
           <a:solidFill>
-            <a:srgbClr val="12171C"/>
+            <a:srgbClr val="181818"/>
           </a:solidFill>
-          <a:ln/>
+          <a:ln w="9525">
+            <a:solidFill>
+              <a:srgbClr val="2B2B2B"/>
+            </a:solidFill>
+            <a:prstDash val="solid"/>
+          </a:ln>
           <a:effectLst>
             <a:outerShdw sx="100000" sy="100000" kx="0" ky="0" algn="bl" rotWithShape="0" blurRad="101600" dist="25400" dir="5400000">
               <a:srgbClr val="223548">
@@ -12849,42 +12854,25 @@
       </p:sp>
       <p:sp>
         <p:nvSpPr>
-          <p:cNvPr id="6" name="Text 3"/>
-          <p:cNvSpPr txBox="1"/>
-          <p:nvPr/>
-        </p:nvSpPr>
-        <p:spPr>
-          <a:xfrm>
-            <a:off x="777240" y="1755648"/>
-            <a:ext cx="6035040" cy="256032"/>
-          </a:xfrm>
-          <a:prstGeom prst="rect">
-            <a:avLst/>
-          </a:prstGeom>
-          <a:noFill/>
-          <a:ln/>
-        </p:spPr>
-        <p:txBody>
-          <a:bodyPr wrap="square" lIns="0" tIns="0" rIns="0" bIns="0" rtlCol="0" anchor="ctr"/>
-          <a:lstStyle/>
-          <a:p>
-            <a:pPr indent="0" marL="0">
-              <a:buNone/>
-            </a:pPr>
-            <a:r>
-              <a:rPr lang="en-US" sz="1000" dirty="0">
-                <a:solidFill>
-                  <a:srgbClr val="A9B4BE"/>
-                </a:solidFill>
-                <a:latin typeface="Courier New" pitchFamily="34" charset="0"/>
-                <a:ea typeface="Courier New" pitchFamily="34" charset="-122"/>
-                <a:cs typeface="Courier New" pitchFamily="34" charset="-120"/>
-              </a:rPr>
-              <a:t>ZAVBS_PC_PEDIDOS/Dictionary/ZTA_PC_PEDIDO.abap</a:t>
-            </a:r>
-            <a:endParaRPr lang="en-US" sz="1000" dirty="0"/>
-          </a:p>
-        </p:txBody>
+          <p:cNvPr id="6" name="Área do editor"/>
+          <p:cNvSpPr/>
+          <p:nvPr/>
+        </p:nvSpPr>
+        <p:spPr>
+          <a:xfrm>
+            <a:off x="548640" y="1993392"/>
+            <a:ext cx="6492240" cy="4178808"/>
+          </a:xfrm>
+          <a:prstGeom prst="roundRect">
+            <a:avLst>
+              <a:gd name="adj" fmla="val 2188"/>
+            </a:avLst>
+          </a:prstGeom>
+          <a:solidFill>
+            <a:srgbClr val="1F1F1F"/>
+          </a:solidFill>
+          <a:ln/>
+        </p:spPr>
       </p:sp>
       <p:sp>
         <p:nvSpPr>
@@ -12894,16 +12882,36 @@
         </p:nvSpPr>
         <p:spPr>
           <a:xfrm>
-            <a:off x="777240" y="2066544"/>
-            <a:ext cx="6035040" cy="0"/>
+            <a:off x="557784" y="1993392"/>
+            <a:ext cx="6473952" cy="137160"/>
+          </a:xfrm>
+          <a:prstGeom prst="rect">
+            <a:avLst/>
+          </a:prstGeom>
+          <a:solidFill>
+            <a:srgbClr val="1F1F1F"/>
+          </a:solidFill>
+          <a:ln/>
+        </p:spPr>
+      </p:sp>
+      <p:sp>
+        <p:nvSpPr>
+          <p:cNvPr id="8" name="Shape 5"/>
+          <p:cNvSpPr/>
+          <p:nvPr/>
+        </p:nvSpPr>
+        <p:spPr>
+          <a:xfrm>
+            <a:off x="557784" y="1993392"/>
+            <a:ext cx="6473952" cy="0"/>
           </a:xfrm>
           <a:prstGeom prst="line">
             <a:avLst/>
           </a:prstGeom>
           <a:noFill/>
-          <a:ln w="12700">
+          <a:ln w="9525">
             <a:solidFill>
-              <a:srgbClr val="2E3A46"/>
+              <a:srgbClr val="2B2B2B"/>
             </a:solidFill>
             <a:prstDash val="solid"/>
           </a:ln>
@@ -12911,14 +12919,75 @@
       </p:sp>
       <p:sp>
         <p:nvSpPr>
-          <p:cNvPr id="8" name="Trecho de código"/>
+          <p:cNvPr id="9" name="Aba ZTA_PC_PEDIDO.abap"/>
+          <p:cNvSpPr/>
+          <p:nvPr/>
+        </p:nvSpPr>
+        <p:spPr>
+          <a:xfrm>
+            <a:off x="640080" y="1719072"/>
+            <a:ext cx="1737360" cy="274320"/>
+          </a:xfrm>
+          <a:prstGeom prst="rect">
+            <a:avLst/>
+          </a:prstGeom>
+          <a:solidFill>
+            <a:srgbClr val="1F1F1F"/>
+          </a:solidFill>
+          <a:ln/>
+        </p:spPr>
+        <p:txBody>
+          <a:bodyPr wrap="square" lIns="0" tIns="0" rIns="0" bIns="0" rtlCol="0" anchor="ctr"/>
+          <a:lstStyle/>
+          <a:p>
+            <a:pPr algn="ctr" indent="0" marL="0">
+              <a:buNone/>
+            </a:pPr>
+            <a:r>
+              <a:rPr lang="en-US" sz="1000" dirty="0">
+                <a:solidFill>
+                  <a:srgbClr val="FFFFFF"/>
+                </a:solidFill>
+              </a:rPr>
+              <a:t>ZTA_PC_PEDIDO.abap</a:t>
+            </a:r>
+            <a:endParaRPr lang="en-US" sz="1000" dirty="0"/>
+          </a:p>
+        </p:txBody>
+      </p:sp>
+      <p:sp>
+        <p:nvSpPr>
+          <p:cNvPr id="10" name="Shape 7"/>
+          <p:cNvSpPr/>
+          <p:nvPr/>
+        </p:nvSpPr>
+        <p:spPr>
+          <a:xfrm>
+            <a:off x="640080" y="1719072"/>
+            <a:ext cx="1737360" cy="0"/>
+          </a:xfrm>
+          <a:prstGeom prst="line">
+            <a:avLst/>
+          </a:prstGeom>
+          <a:noFill/>
+          <a:ln w="19050">
+            <a:solidFill>
+              <a:srgbClr val="0078D4"/>
+            </a:solidFill>
+            <a:prstDash val="solid"/>
+          </a:ln>
+        </p:spPr>
+      </p:sp>
+      <p:sp>
+        <p:nvSpPr>
+          <p:cNvPr id="11" name="Breadcrumb"/>
           <p:cNvSpPr txBox="1"/>
           <p:nvPr/>
         </p:nvSpPr>
         <p:spPr>
           <a:xfrm>
-            <a:off x="777240" y="2157984"/>
-            <a:ext cx="6035040" cy="3904488"/>
+            <a:off x="777240" y="2103120"/>
+            <a:ext cx="6035040" cy="219456"/>
           </a:xfrm>
           <a:prstGeom prst="rect">
             <a:avLst/>
@@ -12927,6 +12996,86 @@
           <a:ln/>
         </p:spPr>
         <p:txBody>
+          <a:bodyPr wrap="square" lIns="0" tIns="0" rIns="0" bIns="0" rtlCol="0" anchor="ctr"/>
+          <a:lstStyle/>
+          <a:p>
+            <a:pPr indent="0" marL="0">
+              <a:buNone/>
+            </a:pPr>
+            <a:r>
+              <a:rPr lang="en-US" sz="900" dirty="0">
+                <a:solidFill>
+                  <a:srgbClr val="A9A9A9"/>
+                </a:solidFill>
+              </a:rPr>
+              <a:t>ZAVBS_PC_PEDIDOS</a:t>
+            </a:r>
+            <a:pPr indent="0" marL="0">
+              <a:buNone/>
+            </a:pPr>
+            <a:r>
+              <a:rPr lang="en-US" sz="900" dirty="0">
+                <a:solidFill>
+                  <a:srgbClr val="6E7681"/>
+                </a:solidFill>
+              </a:rPr>
+              <a:t>  ›  </a:t>
+            </a:r>
+            <a:pPr indent="0" marL="0">
+              <a:buNone/>
+            </a:pPr>
+            <a:r>
+              <a:rPr lang="en-US" sz="900" dirty="0">
+                <a:solidFill>
+                  <a:srgbClr val="A9A9A9"/>
+                </a:solidFill>
+              </a:rPr>
+              <a:t>Dictionary</a:t>
+            </a:r>
+            <a:pPr indent="0" marL="0">
+              <a:buNone/>
+            </a:pPr>
+            <a:r>
+              <a:rPr lang="en-US" sz="900" dirty="0">
+                <a:solidFill>
+                  <a:srgbClr val="6E7681"/>
+                </a:solidFill>
+              </a:rPr>
+              <a:t>  ›  </a:t>
+            </a:r>
+            <a:pPr indent="0" marL="0">
+              <a:buNone/>
+            </a:pPr>
+            <a:r>
+              <a:rPr lang="en-US" sz="900" dirty="0">
+                <a:solidFill>
+                  <a:srgbClr val="A9A9A9"/>
+                </a:solidFill>
+              </a:rPr>
+              <a:t>ZTA_PC_PEDIDO.abap</a:t>
+            </a:r>
+            <a:endParaRPr lang="en-US" sz="900" dirty="0"/>
+          </a:p>
+        </p:txBody>
+      </p:sp>
+      <p:sp>
+        <p:nvSpPr>
+          <p:cNvPr id="12" name="Trecho de código"/>
+          <p:cNvSpPr txBox="1"/>
+          <p:nvPr/>
+        </p:nvSpPr>
+        <p:spPr>
+          <a:xfrm>
+            <a:off x="731520" y="2414016"/>
+            <a:ext cx="6172200" cy="3666744"/>
+          </a:xfrm>
+          <a:prstGeom prst="rect">
+            <a:avLst/>
+          </a:prstGeom>
+          <a:noFill/>
+          <a:ln/>
+        </p:spPr>
+        <p:txBody>
           <a:bodyPr wrap="square" lIns="0" tIns="0" rIns="0" bIns="0" rtlCol="0" anchor="t"/>
           <a:lstStyle/>
           <a:p>
@@ -12939,7 +13088,24 @@
             <a:r>
               <a:rPr lang="en-US" sz="1150" dirty="0">
                 <a:solidFill>
-                  <a:srgbClr val="F0AB00"/>
+                  <a:srgbClr val="6E7681"/>
+                </a:solidFill>
+                <a:latin typeface="Courier New" pitchFamily="34" charset="0"/>
+                <a:ea typeface="Courier New" pitchFamily="34" charset="-122"/>
+                <a:cs typeface="Courier New" pitchFamily="34" charset="-120"/>
+              </a:rPr>
+              <a:t> 1  </a:t>
+            </a:r>
+            <a:pPr indent="0" marL="0">
+              <a:lnSpc>
+                <a:spcPct val="105000"/>
+              </a:lnSpc>
+              <a:buNone/>
+            </a:pPr>
+            <a:r>
+              <a:rPr lang="en-US" sz="1150" dirty="0">
+                <a:solidFill>
+                  <a:srgbClr val="DCDCAA"/>
                 </a:solidFill>
                 <a:latin typeface="Courier New" pitchFamily="34" charset="0"/>
                 <a:ea typeface="Courier New" pitchFamily="34" charset="-122"/>
@@ -12956,24 +13122,58 @@
             <a:r>
               <a:rPr lang="en-US" sz="1150" dirty="0">
                 <a:solidFill>
-                  <a:srgbClr val="E8ECEF"/>
-                </a:solidFill>
-                <a:latin typeface="Courier New" pitchFamily="34" charset="0"/>
-                <a:ea typeface="Courier New" pitchFamily="34" charset="-122"/>
-                <a:cs typeface="Courier New" pitchFamily="34" charset="-120"/>
-              </a:rPr>
-              <a:t> : </a:t>
-            </a:r>
-            <a:pPr indent="0" marL="0">
-              <a:lnSpc>
-                <a:spcPct val="105000"/>
-              </a:lnSpc>
-              <a:buNone/>
-            </a:pPr>
-            <a:r>
-              <a:rPr lang="en-US" sz="1150" dirty="0">
-                <a:solidFill>
-                  <a:srgbClr val="8FD694"/>
+                  <a:srgbClr val="CCCCCC"/>
+                </a:solidFill>
+                <a:latin typeface="Courier New" pitchFamily="34" charset="0"/>
+                <a:ea typeface="Courier New" pitchFamily="34" charset="-122"/>
+                <a:cs typeface="Courier New" pitchFamily="34" charset="-120"/>
+              </a:rPr>
+              <a:t> </a:t>
+            </a:r>
+            <a:pPr indent="0" marL="0">
+              <a:lnSpc>
+                <a:spcPct val="105000"/>
+              </a:lnSpc>
+              <a:buNone/>
+            </a:pPr>
+            <a:r>
+              <a:rPr lang="en-US" sz="1150" dirty="0">
+                <a:solidFill>
+                  <a:srgbClr val="CCCCCC"/>
+                </a:solidFill>
+                <a:latin typeface="Courier New" pitchFamily="34" charset="0"/>
+                <a:ea typeface="Courier New" pitchFamily="34" charset="-122"/>
+                <a:cs typeface="Courier New" pitchFamily="34" charset="-120"/>
+              </a:rPr>
+              <a:t>:</a:t>
+            </a:r>
+            <a:pPr indent="0" marL="0">
+              <a:lnSpc>
+                <a:spcPct val="105000"/>
+              </a:lnSpc>
+              <a:buNone/>
+            </a:pPr>
+            <a:r>
+              <a:rPr lang="en-US" sz="1150" dirty="0">
+                <a:solidFill>
+                  <a:srgbClr val="CCCCCC"/>
+                </a:solidFill>
+                <a:latin typeface="Courier New" pitchFamily="34" charset="0"/>
+                <a:ea typeface="Courier New" pitchFamily="34" charset="-122"/>
+                <a:cs typeface="Courier New" pitchFamily="34" charset="-120"/>
+              </a:rPr>
+              <a:t> </a:t>
+            </a:r>
+            <a:pPr indent="0" marL="0">
+              <a:lnSpc>
+                <a:spcPct val="105000"/>
+              </a:lnSpc>
+              <a:buNone/>
+            </a:pPr>
+            <a:r>
+              <a:rPr lang="en-US" sz="1150" dirty="0">
+                <a:solidFill>
+                  <a:srgbClr val="CE9178"/>
                 </a:solidFill>
                 <a:latin typeface="Courier New" pitchFamily="34" charset="0"/>
                 <a:ea typeface="Courier New" pitchFamily="34" charset="-122"/>
@@ -12993,7 +13193,24 @@
             <a:r>
               <a:rPr lang="en-US" sz="1150" dirty="0">
                 <a:solidFill>
-                  <a:srgbClr val="F0AB00"/>
+                  <a:srgbClr val="6E7681"/>
+                </a:solidFill>
+                <a:latin typeface="Courier New" pitchFamily="34" charset="0"/>
+                <a:ea typeface="Courier New" pitchFamily="34" charset="-122"/>
+                <a:cs typeface="Courier New" pitchFamily="34" charset="-120"/>
+              </a:rPr>
+              <a:t> 2  </a:t>
+            </a:r>
+            <a:pPr indent="0" marL="0">
+              <a:lnSpc>
+                <a:spcPct val="105000"/>
+              </a:lnSpc>
+              <a:buNone/>
+            </a:pPr>
+            <a:r>
+              <a:rPr lang="en-US" sz="1150" dirty="0">
+                <a:solidFill>
+                  <a:srgbClr val="DCDCAA"/>
                 </a:solidFill>
                 <a:latin typeface="Courier New" pitchFamily="34" charset="0"/>
                 <a:ea typeface="Courier New" pitchFamily="34" charset="-122"/>
@@ -13010,24 +13227,58 @@
             <a:r>
               <a:rPr lang="en-US" sz="1150" dirty="0">
                 <a:solidFill>
-                  <a:srgbClr val="E8ECEF"/>
-                </a:solidFill>
-                <a:latin typeface="Courier New" pitchFamily="34" charset="0"/>
-                <a:ea typeface="Courier New" pitchFamily="34" charset="-122"/>
-                <a:cs typeface="Courier New" pitchFamily="34" charset="-120"/>
-              </a:rPr>
-              <a:t> : </a:t>
-            </a:r>
-            <a:pPr indent="0" marL="0">
-              <a:lnSpc>
-                <a:spcPct val="105000"/>
-              </a:lnSpc>
-              <a:buNone/>
-            </a:pPr>
-            <a:r>
-              <a:rPr lang="en-US" sz="1150" dirty="0">
-                <a:solidFill>
-                  <a:srgbClr val="D9A6FF"/>
+                  <a:srgbClr val="CCCCCC"/>
+                </a:solidFill>
+                <a:latin typeface="Courier New" pitchFamily="34" charset="0"/>
+                <a:ea typeface="Courier New" pitchFamily="34" charset="-122"/>
+                <a:cs typeface="Courier New" pitchFamily="34" charset="-120"/>
+              </a:rPr>
+              <a:t> </a:t>
+            </a:r>
+            <a:pPr indent="0" marL="0">
+              <a:lnSpc>
+                <a:spcPct val="105000"/>
+              </a:lnSpc>
+              <a:buNone/>
+            </a:pPr>
+            <a:r>
+              <a:rPr lang="en-US" sz="1150" dirty="0">
+                <a:solidFill>
+                  <a:srgbClr val="CCCCCC"/>
+                </a:solidFill>
+                <a:latin typeface="Courier New" pitchFamily="34" charset="0"/>
+                <a:ea typeface="Courier New" pitchFamily="34" charset="-122"/>
+                <a:cs typeface="Courier New" pitchFamily="34" charset="-120"/>
+              </a:rPr>
+              <a:t>:</a:t>
+            </a:r>
+            <a:pPr indent="0" marL="0">
+              <a:lnSpc>
+                <a:spcPct val="105000"/>
+              </a:lnSpc>
+              <a:buNone/>
+            </a:pPr>
+            <a:r>
+              <a:rPr lang="en-US" sz="1150" dirty="0">
+                <a:solidFill>
+                  <a:srgbClr val="CCCCCC"/>
+                </a:solidFill>
+                <a:latin typeface="Courier New" pitchFamily="34" charset="0"/>
+                <a:ea typeface="Courier New" pitchFamily="34" charset="-122"/>
+                <a:cs typeface="Courier New" pitchFamily="34" charset="-120"/>
+              </a:rPr>
+              <a:t> </a:t>
+            </a:r>
+            <a:pPr indent="0" marL="0">
+              <a:lnSpc>
+                <a:spcPct val="105000"/>
+              </a:lnSpc>
+              <a:buNone/>
+            </a:pPr>
+            <a:r>
+              <a:rPr lang="en-US" sz="1150" dirty="0">
+                <a:solidFill>
+                  <a:srgbClr val="4FC1FF"/>
                 </a:solidFill>
                 <a:latin typeface="Courier New" pitchFamily="34" charset="0"/>
                 <a:ea typeface="Courier New" pitchFamily="34" charset="-122"/>
@@ -13047,7 +13298,24 @@
             <a:r>
               <a:rPr lang="en-US" sz="1150" dirty="0">
                 <a:solidFill>
-                  <a:srgbClr val="F0AB00"/>
+                  <a:srgbClr val="6E7681"/>
+                </a:solidFill>
+                <a:latin typeface="Courier New" pitchFamily="34" charset="0"/>
+                <a:ea typeface="Courier New" pitchFamily="34" charset="-122"/>
+                <a:cs typeface="Courier New" pitchFamily="34" charset="-120"/>
+              </a:rPr>
+              <a:t> 3  </a:t>
+            </a:r>
+            <a:pPr indent="0" marL="0">
+              <a:lnSpc>
+                <a:spcPct val="105000"/>
+              </a:lnSpc>
+              <a:buNone/>
+            </a:pPr>
+            <a:r>
+              <a:rPr lang="en-US" sz="1150" dirty="0">
+                <a:solidFill>
+                  <a:srgbClr val="DCDCAA"/>
                 </a:solidFill>
                 <a:latin typeface="Courier New" pitchFamily="34" charset="0"/>
                 <a:ea typeface="Courier New" pitchFamily="34" charset="-122"/>
@@ -13064,24 +13332,58 @@
             <a:r>
               <a:rPr lang="en-US" sz="1150" dirty="0">
                 <a:solidFill>
-                  <a:srgbClr val="E8ECEF"/>
-                </a:solidFill>
-                <a:latin typeface="Courier New" pitchFamily="34" charset="0"/>
-                <a:ea typeface="Courier New" pitchFamily="34" charset="-122"/>
-                <a:cs typeface="Courier New" pitchFamily="34" charset="-120"/>
-              </a:rPr>
-              <a:t> : </a:t>
-            </a:r>
-            <a:pPr indent="0" marL="0">
-              <a:lnSpc>
-                <a:spcPct val="105000"/>
-              </a:lnSpc>
-              <a:buNone/>
-            </a:pPr>
-            <a:r>
-              <a:rPr lang="en-US" sz="1150" dirty="0">
-                <a:solidFill>
-                  <a:srgbClr val="D9A6FF"/>
+                  <a:srgbClr val="CCCCCC"/>
+                </a:solidFill>
+                <a:latin typeface="Courier New" pitchFamily="34" charset="0"/>
+                <a:ea typeface="Courier New" pitchFamily="34" charset="-122"/>
+                <a:cs typeface="Courier New" pitchFamily="34" charset="-120"/>
+              </a:rPr>
+              <a:t> </a:t>
+            </a:r>
+            <a:pPr indent="0" marL="0">
+              <a:lnSpc>
+                <a:spcPct val="105000"/>
+              </a:lnSpc>
+              <a:buNone/>
+            </a:pPr>
+            <a:r>
+              <a:rPr lang="en-US" sz="1150" dirty="0">
+                <a:solidFill>
+                  <a:srgbClr val="CCCCCC"/>
+                </a:solidFill>
+                <a:latin typeface="Courier New" pitchFamily="34" charset="0"/>
+                <a:ea typeface="Courier New" pitchFamily="34" charset="-122"/>
+                <a:cs typeface="Courier New" pitchFamily="34" charset="-120"/>
+              </a:rPr>
+              <a:t>:</a:t>
+            </a:r>
+            <a:pPr indent="0" marL="0">
+              <a:lnSpc>
+                <a:spcPct val="105000"/>
+              </a:lnSpc>
+              <a:buNone/>
+            </a:pPr>
+            <a:r>
+              <a:rPr lang="en-US" sz="1150" dirty="0">
+                <a:solidFill>
+                  <a:srgbClr val="CCCCCC"/>
+                </a:solidFill>
+                <a:latin typeface="Courier New" pitchFamily="34" charset="0"/>
+                <a:ea typeface="Courier New" pitchFamily="34" charset="-122"/>
+                <a:cs typeface="Courier New" pitchFamily="34" charset="-120"/>
+              </a:rPr>
+              <a:t> </a:t>
+            </a:r>
+            <a:pPr indent="0" marL="0">
+              <a:lnSpc>
+                <a:spcPct val="105000"/>
+              </a:lnSpc>
+              <a:buNone/>
+            </a:pPr>
+            <a:r>
+              <a:rPr lang="en-US" sz="1150" dirty="0">
+                <a:solidFill>
+                  <a:srgbClr val="4FC1FF"/>
                 </a:solidFill>
                 <a:latin typeface="Courier New" pitchFamily="34" charset="0"/>
                 <a:ea typeface="Courier New" pitchFamily="34" charset="-122"/>
@@ -13101,7 +13403,24 @@
             <a:r>
               <a:rPr lang="en-US" sz="1150" dirty="0">
                 <a:solidFill>
-                  <a:srgbClr val="4DB1FF"/>
+                  <a:srgbClr val="6E7681"/>
+                </a:solidFill>
+                <a:latin typeface="Courier New" pitchFamily="34" charset="0"/>
+                <a:ea typeface="Courier New" pitchFamily="34" charset="-122"/>
+                <a:cs typeface="Courier New" pitchFamily="34" charset="-120"/>
+              </a:rPr>
+              <a:t> 4  </a:t>
+            </a:r>
+            <a:pPr indent="0" marL="0">
+              <a:lnSpc>
+                <a:spcPct val="105000"/>
+              </a:lnSpc>
+              <a:buNone/>
+            </a:pPr>
+            <a:r>
+              <a:rPr lang="en-US" sz="1150" dirty="0">
+                <a:solidFill>
+                  <a:srgbClr val="569CD6"/>
                 </a:solidFill>
                 <a:latin typeface="Courier New" pitchFamily="34" charset="0"/>
                 <a:ea typeface="Courier New" pitchFamily="34" charset="-122"/>
@@ -13118,7 +13437,7 @@
             <a:r>
               <a:rPr lang="en-US" sz="1150" dirty="0">
                 <a:solidFill>
-                  <a:srgbClr val="E8ECEF"/>
+                  <a:srgbClr val="CCCCCC"/>
                 </a:solidFill>
                 <a:latin typeface="Courier New" pitchFamily="34" charset="0"/>
                 <a:ea typeface="Courier New" pitchFamily="34" charset="-122"/>
@@ -13135,7 +13454,7 @@
             <a:r>
               <a:rPr lang="en-US" sz="1150" dirty="0">
                 <a:solidFill>
-                  <a:srgbClr val="4DB1FF"/>
+                  <a:srgbClr val="569CD6"/>
                 </a:solidFill>
                 <a:latin typeface="Courier New" pitchFamily="34" charset="0"/>
                 <a:ea typeface="Courier New" pitchFamily="34" charset="-122"/>
@@ -13152,7 +13471,7 @@
             <a:r>
               <a:rPr lang="en-US" sz="1150" dirty="0">
                 <a:solidFill>
-                  <a:srgbClr val="E8ECEF"/>
+                  <a:srgbClr val="CCCCCC"/>
                 </a:solidFill>
                 <a:latin typeface="Courier New" pitchFamily="34" charset="0"/>
                 <a:ea typeface="Courier New" pitchFamily="34" charset="-122"/>
@@ -13169,7 +13488,7 @@
             <a:r>
               <a:rPr lang="en-US" sz="1150" dirty="0">
                 <a:solidFill>
-                  <a:srgbClr val="E8ECEF"/>
+                  <a:srgbClr val="4EC9B0"/>
                 </a:solidFill>
                 <a:latin typeface="Courier New" pitchFamily="34" charset="0"/>
                 <a:ea typeface="Courier New" pitchFamily="34" charset="-122"/>
@@ -13186,13 +13505,30 @@
             <a:r>
               <a:rPr lang="en-US" sz="1150" dirty="0">
                 <a:solidFill>
-                  <a:srgbClr val="E8ECEF"/>
-                </a:solidFill>
-                <a:latin typeface="Courier New" pitchFamily="34" charset="0"/>
-                <a:ea typeface="Courier New" pitchFamily="34" charset="-122"/>
-                <a:cs typeface="Courier New" pitchFamily="34" charset="-120"/>
-              </a:rPr>
-              <a:t> {</a:t>
+                  <a:srgbClr val="CCCCCC"/>
+                </a:solidFill>
+                <a:latin typeface="Courier New" pitchFamily="34" charset="0"/>
+                <a:ea typeface="Courier New" pitchFamily="34" charset="-122"/>
+                <a:cs typeface="Courier New" pitchFamily="34" charset="-120"/>
+              </a:rPr>
+              <a:t> </a:t>
+            </a:r>
+            <a:pPr indent="0" marL="0">
+              <a:lnSpc>
+                <a:spcPct val="105000"/>
+              </a:lnSpc>
+              <a:buNone/>
+            </a:pPr>
+            <a:r>
+              <a:rPr lang="en-US" sz="1150" dirty="0">
+                <a:solidFill>
+                  <a:srgbClr val="CCCCCC"/>
+                </a:solidFill>
+                <a:latin typeface="Courier New" pitchFamily="34" charset="0"/>
+                <a:ea typeface="Courier New" pitchFamily="34" charset="-122"/>
+                <a:cs typeface="Courier New" pitchFamily="34" charset="-120"/>
+              </a:rPr>
+              <a:t>{</a:t>
             </a:r>
             <a:endParaRPr lang="en-US" sz="1150" dirty="0"/>
           </a:p>
@@ -13206,7 +13542,24 @@
             <a:r>
               <a:rPr lang="en-US" sz="1150" dirty="0">
                 <a:solidFill>
-                  <a:srgbClr val="E8ECEF"/>
+                  <a:srgbClr val="6E7681"/>
+                </a:solidFill>
+                <a:latin typeface="Courier New" pitchFamily="34" charset="0"/>
+                <a:ea typeface="Courier New" pitchFamily="34" charset="-122"/>
+                <a:cs typeface="Courier New" pitchFamily="34" charset="-120"/>
+              </a:rPr>
+              <a:t> 5  </a:t>
+            </a:r>
+            <a:pPr indent="0" marL="0">
+              <a:lnSpc>
+                <a:spcPct val="105000"/>
+              </a:lnSpc>
+              <a:buNone/>
+            </a:pPr>
+            <a:r>
+              <a:rPr lang="en-US" sz="1150" dirty="0">
+                <a:solidFill>
+                  <a:srgbClr val="CCCCCC"/>
                 </a:solidFill>
                 <a:latin typeface="Courier New" pitchFamily="34" charset="0"/>
                 <a:ea typeface="Courier New" pitchFamily="34" charset="-122"/>
@@ -13223,7 +13576,7 @@
             <a:r>
               <a:rPr lang="en-US" sz="1150" dirty="0">
                 <a:solidFill>
-                  <a:srgbClr val="4DB1FF"/>
+                  <a:srgbClr val="569CD6"/>
                 </a:solidFill>
                 <a:latin typeface="Courier New" pitchFamily="34" charset="0"/>
                 <a:ea typeface="Courier New" pitchFamily="34" charset="-122"/>
@@ -13240,7 +13593,7 @@
             <a:r>
               <a:rPr lang="en-US" sz="1150" dirty="0">
                 <a:solidFill>
-                  <a:srgbClr val="E8ECEF"/>
+                  <a:srgbClr val="CCCCCC"/>
                 </a:solidFill>
                 <a:latin typeface="Courier New" pitchFamily="34" charset="0"/>
                 <a:ea typeface="Courier New" pitchFamily="34" charset="-122"/>
@@ -13257,7 +13610,7 @@
             <a:r>
               <a:rPr lang="en-US" sz="1150" dirty="0">
                 <a:solidFill>
-                  <a:srgbClr val="E8ECEF"/>
+                  <a:srgbClr val="CCCCCC"/>
                 </a:solidFill>
                 <a:latin typeface="Courier New" pitchFamily="34" charset="0"/>
                 <a:ea typeface="Courier New" pitchFamily="34" charset="-122"/>
@@ -13274,75 +13627,41 @@
             <a:r>
               <a:rPr lang="en-US" sz="1150" dirty="0">
                 <a:solidFill>
-                  <a:srgbClr val="E8ECEF"/>
-                </a:solidFill>
-                <a:latin typeface="Courier New" pitchFamily="34" charset="0"/>
-                <a:ea typeface="Courier New" pitchFamily="34" charset="-122"/>
-                <a:cs typeface="Courier New" pitchFamily="34" charset="-120"/>
-              </a:rPr>
-              <a:t>            : </a:t>
-            </a:r>
-            <a:pPr indent="0" marL="0">
-              <a:lnSpc>
-                <a:spcPct val="105000"/>
-              </a:lnSpc>
-              <a:buNone/>
-            </a:pPr>
-            <a:r>
-              <a:rPr lang="en-US" sz="1150" dirty="0">
-                <a:solidFill>
-                  <a:srgbClr val="E8ECEF"/>
-                </a:solidFill>
-                <a:latin typeface="Courier New" pitchFamily="34" charset="0"/>
-                <a:ea typeface="Courier New" pitchFamily="34" charset="-122"/>
-                <a:cs typeface="Courier New" pitchFamily="34" charset="-120"/>
-              </a:rPr>
-              <a:t>abap</a:t>
-            </a:r>
-            <a:pPr indent="0" marL="0">
-              <a:lnSpc>
-                <a:spcPct val="105000"/>
-              </a:lnSpc>
-              <a:buNone/>
-            </a:pPr>
-            <a:r>
-              <a:rPr lang="en-US" sz="1150" dirty="0">
-                <a:solidFill>
-                  <a:srgbClr val="E8ECEF"/>
-                </a:solidFill>
-                <a:latin typeface="Courier New" pitchFamily="34" charset="0"/>
-                <a:ea typeface="Courier New" pitchFamily="34" charset="-122"/>
-                <a:cs typeface="Courier New" pitchFamily="34" charset="-120"/>
-              </a:rPr>
-              <a:t>.</a:t>
-            </a:r>
-            <a:pPr indent="0" marL="0">
-              <a:lnSpc>
-                <a:spcPct val="105000"/>
-              </a:lnSpc>
-              <a:buNone/>
-            </a:pPr>
-            <a:r>
-              <a:rPr lang="en-US" sz="1150" dirty="0">
-                <a:solidFill>
-                  <a:srgbClr val="E8ECEF"/>
-                </a:solidFill>
-                <a:latin typeface="Courier New" pitchFamily="34" charset="0"/>
-                <a:ea typeface="Courier New" pitchFamily="34" charset="-122"/>
-                <a:cs typeface="Courier New" pitchFamily="34" charset="-120"/>
-              </a:rPr>
-              <a:t>clnt</a:t>
-            </a:r>
-            <a:pPr indent="0" marL="0">
-              <a:lnSpc>
-                <a:spcPct val="105000"/>
-              </a:lnSpc>
-              <a:buNone/>
-            </a:pPr>
-            <a:r>
-              <a:rPr lang="en-US" sz="1150" dirty="0">
-                <a:solidFill>
-                  <a:srgbClr val="E8ECEF"/>
+                  <a:srgbClr val="CCCCCC"/>
+                </a:solidFill>
+                <a:latin typeface="Courier New" pitchFamily="34" charset="0"/>
+                <a:ea typeface="Courier New" pitchFamily="34" charset="-122"/>
+                <a:cs typeface="Courier New" pitchFamily="34" charset="-120"/>
+              </a:rPr>
+              <a:t>            </a:t>
+            </a:r>
+            <a:pPr indent="0" marL="0">
+              <a:lnSpc>
+                <a:spcPct val="105000"/>
+              </a:lnSpc>
+              <a:buNone/>
+            </a:pPr>
+            <a:r>
+              <a:rPr lang="en-US" sz="1150" dirty="0">
+                <a:solidFill>
+                  <a:srgbClr val="CCCCCC"/>
+                </a:solidFill>
+                <a:latin typeface="Courier New" pitchFamily="34" charset="0"/>
+                <a:ea typeface="Courier New" pitchFamily="34" charset="-122"/>
+                <a:cs typeface="Courier New" pitchFamily="34" charset="-120"/>
+              </a:rPr>
+              <a:t>:</a:t>
+            </a:r>
+            <a:pPr indent="0" marL="0">
+              <a:lnSpc>
+                <a:spcPct val="105000"/>
+              </a:lnSpc>
+              <a:buNone/>
+            </a:pPr>
+            <a:r>
+              <a:rPr lang="en-US" sz="1150" dirty="0">
+                <a:solidFill>
+                  <a:srgbClr val="CCCCCC"/>
                 </a:solidFill>
                 <a:latin typeface="Courier New" pitchFamily="34" charset="0"/>
                 <a:ea typeface="Courier New" pitchFamily="34" charset="-122"/>
@@ -13359,7 +13678,41 @@
             <a:r>
               <a:rPr lang="en-US" sz="1150" dirty="0">
                 <a:solidFill>
-                  <a:srgbClr val="4DB1FF"/>
+                  <a:srgbClr val="4EC9B0"/>
+                </a:solidFill>
+                <a:latin typeface="Courier New" pitchFamily="34" charset="0"/>
+                <a:ea typeface="Courier New" pitchFamily="34" charset="-122"/>
+                <a:cs typeface="Courier New" pitchFamily="34" charset="-120"/>
+              </a:rPr>
+              <a:t>abap.clnt</a:t>
+            </a:r>
+            <a:pPr indent="0" marL="0">
+              <a:lnSpc>
+                <a:spcPct val="105000"/>
+              </a:lnSpc>
+              <a:buNone/>
+            </a:pPr>
+            <a:r>
+              <a:rPr lang="en-US" sz="1150" dirty="0">
+                <a:solidFill>
+                  <a:srgbClr val="CCCCCC"/>
+                </a:solidFill>
+                <a:latin typeface="Courier New" pitchFamily="34" charset="0"/>
+                <a:ea typeface="Courier New" pitchFamily="34" charset="-122"/>
+                <a:cs typeface="Courier New" pitchFamily="34" charset="-120"/>
+              </a:rPr>
+              <a:t> </a:t>
+            </a:r>
+            <a:pPr indent="0" marL="0">
+              <a:lnSpc>
+                <a:spcPct val="105000"/>
+              </a:lnSpc>
+              <a:buNone/>
+            </a:pPr>
+            <a:r>
+              <a:rPr lang="en-US" sz="1150" dirty="0">
+                <a:solidFill>
+                  <a:srgbClr val="569CD6"/>
                 </a:solidFill>
                 <a:latin typeface="Courier New" pitchFamily="34" charset="0"/>
                 <a:ea typeface="Courier New" pitchFamily="34" charset="-122"/>
@@ -13376,7 +13729,7 @@
             <a:r>
               <a:rPr lang="en-US" sz="1150" dirty="0">
                 <a:solidFill>
-                  <a:srgbClr val="E8ECEF"/>
+                  <a:srgbClr val="CCCCCC"/>
                 </a:solidFill>
                 <a:latin typeface="Courier New" pitchFamily="34" charset="0"/>
                 <a:ea typeface="Courier New" pitchFamily="34" charset="-122"/>
@@ -13393,7 +13746,7 @@
             <a:r>
               <a:rPr lang="en-US" sz="1150" dirty="0">
                 <a:solidFill>
-                  <a:srgbClr val="4DB1FF"/>
+                  <a:srgbClr val="569CD6"/>
                 </a:solidFill>
                 <a:latin typeface="Courier New" pitchFamily="34" charset="0"/>
                 <a:ea typeface="Courier New" pitchFamily="34" charset="-122"/>
@@ -13410,7 +13763,7 @@
             <a:r>
               <a:rPr lang="en-US" sz="1150" dirty="0">
                 <a:solidFill>
-                  <a:srgbClr val="E8ECEF"/>
+                  <a:srgbClr val="CCCCCC"/>
                 </a:solidFill>
                 <a:latin typeface="Courier New" pitchFamily="34" charset="0"/>
                 <a:ea typeface="Courier New" pitchFamily="34" charset="-122"/>
@@ -13430,7 +13783,24 @@
             <a:r>
               <a:rPr lang="en-US" sz="1150" dirty="0">
                 <a:solidFill>
-                  <a:srgbClr val="E8ECEF"/>
+                  <a:srgbClr val="6E7681"/>
+                </a:solidFill>
+                <a:latin typeface="Courier New" pitchFamily="34" charset="0"/>
+                <a:ea typeface="Courier New" pitchFamily="34" charset="-122"/>
+                <a:cs typeface="Courier New" pitchFamily="34" charset="-120"/>
+              </a:rPr>
+              <a:t> 6  </a:t>
+            </a:r>
+            <a:pPr indent="0" marL="0">
+              <a:lnSpc>
+                <a:spcPct val="105000"/>
+              </a:lnSpc>
+              <a:buNone/>
+            </a:pPr>
+            <a:r>
+              <a:rPr lang="en-US" sz="1150" dirty="0">
+                <a:solidFill>
+                  <a:srgbClr val="CCCCCC"/>
                 </a:solidFill>
                 <a:latin typeface="Courier New" pitchFamily="34" charset="0"/>
                 <a:ea typeface="Courier New" pitchFamily="34" charset="-122"/>
@@ -13447,7 +13817,7 @@
             <a:r>
               <a:rPr lang="en-US" sz="1150" dirty="0">
                 <a:solidFill>
-                  <a:srgbClr val="4DB1FF"/>
+                  <a:srgbClr val="569CD6"/>
                 </a:solidFill>
                 <a:latin typeface="Courier New" pitchFamily="34" charset="0"/>
                 <a:ea typeface="Courier New" pitchFamily="34" charset="-122"/>
@@ -13464,7 +13834,7 @@
             <a:r>
               <a:rPr lang="en-US" sz="1150" dirty="0">
                 <a:solidFill>
-                  <a:srgbClr val="E8ECEF"/>
+                  <a:srgbClr val="CCCCCC"/>
                 </a:solidFill>
                 <a:latin typeface="Courier New" pitchFamily="34" charset="0"/>
                 <a:ea typeface="Courier New" pitchFamily="34" charset="-122"/>
@@ -13481,7 +13851,7 @@
             <a:r>
               <a:rPr lang="en-US" sz="1150" dirty="0">
                 <a:solidFill>
-                  <a:srgbClr val="E8ECEF"/>
+                  <a:srgbClr val="CCCCCC"/>
                 </a:solidFill>
                 <a:latin typeface="Courier New" pitchFamily="34" charset="0"/>
                 <a:ea typeface="Courier New" pitchFamily="34" charset="-122"/>
@@ -13498,24 +13868,58 @@
             <a:r>
               <a:rPr lang="en-US" sz="1150" dirty="0">
                 <a:solidFill>
-                  <a:srgbClr val="E8ECEF"/>
-                </a:solidFill>
-                <a:latin typeface="Courier New" pitchFamily="34" charset="0"/>
-                <a:ea typeface="Courier New" pitchFamily="34" charset="-122"/>
-                <a:cs typeface="Courier New" pitchFamily="34" charset="-120"/>
-              </a:rPr>
-              <a:t>       : </a:t>
-            </a:r>
-            <a:pPr indent="0" marL="0">
-              <a:lnSpc>
-                <a:spcPct val="105000"/>
-              </a:lnSpc>
-              <a:buNone/>
-            </a:pPr>
-            <a:r>
-              <a:rPr lang="en-US" sz="1150" dirty="0">
-                <a:solidFill>
-                  <a:srgbClr val="E8ECEF"/>
+                  <a:srgbClr val="CCCCCC"/>
+                </a:solidFill>
+                <a:latin typeface="Courier New" pitchFamily="34" charset="0"/>
+                <a:ea typeface="Courier New" pitchFamily="34" charset="-122"/>
+                <a:cs typeface="Courier New" pitchFamily="34" charset="-120"/>
+              </a:rPr>
+              <a:t>       </a:t>
+            </a:r>
+            <a:pPr indent="0" marL="0">
+              <a:lnSpc>
+                <a:spcPct val="105000"/>
+              </a:lnSpc>
+              <a:buNone/>
+            </a:pPr>
+            <a:r>
+              <a:rPr lang="en-US" sz="1150" dirty="0">
+                <a:solidFill>
+                  <a:srgbClr val="CCCCCC"/>
+                </a:solidFill>
+                <a:latin typeface="Courier New" pitchFamily="34" charset="0"/>
+                <a:ea typeface="Courier New" pitchFamily="34" charset="-122"/>
+                <a:cs typeface="Courier New" pitchFamily="34" charset="-120"/>
+              </a:rPr>
+              <a:t>:</a:t>
+            </a:r>
+            <a:pPr indent="0" marL="0">
+              <a:lnSpc>
+                <a:spcPct val="105000"/>
+              </a:lnSpc>
+              <a:buNone/>
+            </a:pPr>
+            <a:r>
+              <a:rPr lang="en-US" sz="1150" dirty="0">
+                <a:solidFill>
+                  <a:srgbClr val="CCCCCC"/>
+                </a:solidFill>
+                <a:latin typeface="Courier New" pitchFamily="34" charset="0"/>
+                <a:ea typeface="Courier New" pitchFamily="34" charset="-122"/>
+                <a:cs typeface="Courier New" pitchFamily="34" charset="-120"/>
+              </a:rPr>
+              <a:t> </a:t>
+            </a:r>
+            <a:pPr indent="0" marL="0">
+              <a:lnSpc>
+                <a:spcPct val="105000"/>
+              </a:lnSpc>
+              <a:buNone/>
+            </a:pPr>
+            <a:r>
+              <a:rPr lang="en-US" sz="1150" dirty="0">
+                <a:solidFill>
+                  <a:srgbClr val="4EC9B0"/>
                 </a:solidFill>
                 <a:latin typeface="Courier New" pitchFamily="34" charset="0"/>
                 <a:ea typeface="Courier New" pitchFamily="34" charset="-122"/>
@@ -13532,7 +13936,7 @@
             <a:r>
               <a:rPr lang="en-US" sz="1150" dirty="0">
                 <a:solidFill>
-                  <a:srgbClr val="E8ECEF"/>
+                  <a:srgbClr val="CCCCCC"/>
                 </a:solidFill>
                 <a:latin typeface="Courier New" pitchFamily="34" charset="0"/>
                 <a:ea typeface="Courier New" pitchFamily="34" charset="-122"/>
@@ -13549,7 +13953,7 @@
             <a:r>
               <a:rPr lang="en-US" sz="1150" dirty="0">
                 <a:solidFill>
-                  <a:srgbClr val="4DB1FF"/>
+                  <a:srgbClr val="569CD6"/>
                 </a:solidFill>
                 <a:latin typeface="Courier New" pitchFamily="34" charset="0"/>
                 <a:ea typeface="Courier New" pitchFamily="34" charset="-122"/>
@@ -13566,7 +13970,7 @@
             <a:r>
               <a:rPr lang="en-US" sz="1150" dirty="0">
                 <a:solidFill>
-                  <a:srgbClr val="E8ECEF"/>
+                  <a:srgbClr val="CCCCCC"/>
                 </a:solidFill>
                 <a:latin typeface="Courier New" pitchFamily="34" charset="0"/>
                 <a:ea typeface="Courier New" pitchFamily="34" charset="-122"/>
@@ -13583,7 +13987,7 @@
             <a:r>
               <a:rPr lang="en-US" sz="1150" dirty="0">
                 <a:solidFill>
-                  <a:srgbClr val="4DB1FF"/>
+                  <a:srgbClr val="569CD6"/>
                 </a:solidFill>
                 <a:latin typeface="Courier New" pitchFamily="34" charset="0"/>
                 <a:ea typeface="Courier New" pitchFamily="34" charset="-122"/>
@@ -13600,7 +14004,7 @@
             <a:r>
               <a:rPr lang="en-US" sz="1150" dirty="0">
                 <a:solidFill>
-                  <a:srgbClr val="E8ECEF"/>
+                  <a:srgbClr val="CCCCCC"/>
                 </a:solidFill>
                 <a:latin typeface="Courier New" pitchFamily="34" charset="0"/>
                 <a:ea typeface="Courier New" pitchFamily="34" charset="-122"/>
@@ -13620,7 +14024,24 @@
             <a:r>
               <a:rPr lang="en-US" sz="1150" dirty="0">
                 <a:solidFill>
-                  <a:srgbClr val="E8ECEF"/>
+                  <a:srgbClr val="6E7681"/>
+                </a:solidFill>
+                <a:latin typeface="Courier New" pitchFamily="34" charset="0"/>
+                <a:ea typeface="Courier New" pitchFamily="34" charset="-122"/>
+                <a:cs typeface="Courier New" pitchFamily="34" charset="-120"/>
+              </a:rPr>
+              <a:t> 7  </a:t>
+            </a:r>
+            <a:pPr indent="0" marL="0">
+              <a:lnSpc>
+                <a:spcPct val="105000"/>
+              </a:lnSpc>
+              <a:buNone/>
+            </a:pPr>
+            <a:r>
+              <a:rPr lang="en-US" sz="1150" dirty="0">
+                <a:solidFill>
+                  <a:srgbClr val="CCCCCC"/>
                 </a:solidFill>
                 <a:latin typeface="Courier New" pitchFamily="34" charset="0"/>
                 <a:ea typeface="Courier New" pitchFamily="34" charset="-122"/>
@@ -13637,7 +14058,7 @@
             <a:r>
               <a:rPr lang="en-US" sz="1150" dirty="0">
                 <a:solidFill>
-                  <a:srgbClr val="E8ECEF"/>
+                  <a:srgbClr val="CCCCCC"/>
                 </a:solidFill>
                 <a:latin typeface="Courier New" pitchFamily="34" charset="0"/>
                 <a:ea typeface="Courier New" pitchFamily="34" charset="-122"/>
@@ -13654,75 +14075,75 @@
             <a:r>
               <a:rPr lang="en-US" sz="1150" dirty="0">
                 <a:solidFill>
-                  <a:srgbClr val="E8ECEF"/>
-                </a:solidFill>
-                <a:latin typeface="Courier New" pitchFamily="34" charset="0"/>
-                <a:ea typeface="Courier New" pitchFamily="34" charset="-122"/>
-                <a:cs typeface="Courier New" pitchFamily="34" charset="-120"/>
-              </a:rPr>
-              <a:t>         : </a:t>
-            </a:r>
-            <a:pPr indent="0" marL="0">
-              <a:lnSpc>
-                <a:spcPct val="105000"/>
-              </a:lnSpc>
-              <a:buNone/>
-            </a:pPr>
-            <a:r>
-              <a:rPr lang="en-US" sz="1150" dirty="0">
-                <a:solidFill>
-                  <a:srgbClr val="E8ECEF"/>
-                </a:solidFill>
-                <a:latin typeface="Courier New" pitchFamily="34" charset="0"/>
-                <a:ea typeface="Courier New" pitchFamily="34" charset="-122"/>
-                <a:cs typeface="Courier New" pitchFamily="34" charset="-120"/>
-              </a:rPr>
-              <a:t>abap</a:t>
-            </a:r>
-            <a:pPr indent="0" marL="0">
-              <a:lnSpc>
-                <a:spcPct val="105000"/>
-              </a:lnSpc>
-              <a:buNone/>
-            </a:pPr>
-            <a:r>
-              <a:rPr lang="en-US" sz="1150" dirty="0">
-                <a:solidFill>
-                  <a:srgbClr val="E8ECEF"/>
-                </a:solidFill>
-                <a:latin typeface="Courier New" pitchFamily="34" charset="0"/>
-                <a:ea typeface="Courier New" pitchFamily="34" charset="-122"/>
-                <a:cs typeface="Courier New" pitchFamily="34" charset="-120"/>
-              </a:rPr>
-              <a:t>.</a:t>
-            </a:r>
-            <a:pPr indent="0" marL="0">
-              <a:lnSpc>
-                <a:spcPct val="105000"/>
-              </a:lnSpc>
-              <a:buNone/>
-            </a:pPr>
-            <a:r>
-              <a:rPr lang="en-US" sz="1150" dirty="0">
-                <a:solidFill>
-                  <a:srgbClr val="E8ECEF"/>
-                </a:solidFill>
-                <a:latin typeface="Courier New" pitchFamily="34" charset="0"/>
-                <a:ea typeface="Courier New" pitchFamily="34" charset="-122"/>
-                <a:cs typeface="Courier New" pitchFamily="34" charset="-120"/>
-              </a:rPr>
-              <a:t>char</a:t>
-            </a:r>
-            <a:pPr indent="0" marL="0">
-              <a:lnSpc>
-                <a:spcPct val="105000"/>
-              </a:lnSpc>
-              <a:buNone/>
-            </a:pPr>
-            <a:r>
-              <a:rPr lang="en-US" sz="1150" dirty="0">
-                <a:solidFill>
-                  <a:srgbClr val="E8ECEF"/>
+                  <a:srgbClr val="CCCCCC"/>
+                </a:solidFill>
+                <a:latin typeface="Courier New" pitchFamily="34" charset="0"/>
+                <a:ea typeface="Courier New" pitchFamily="34" charset="-122"/>
+                <a:cs typeface="Courier New" pitchFamily="34" charset="-120"/>
+              </a:rPr>
+              <a:t>         </a:t>
+            </a:r>
+            <a:pPr indent="0" marL="0">
+              <a:lnSpc>
+                <a:spcPct val="105000"/>
+              </a:lnSpc>
+              <a:buNone/>
+            </a:pPr>
+            <a:r>
+              <a:rPr lang="en-US" sz="1150" dirty="0">
+                <a:solidFill>
+                  <a:srgbClr val="CCCCCC"/>
+                </a:solidFill>
+                <a:latin typeface="Courier New" pitchFamily="34" charset="0"/>
+                <a:ea typeface="Courier New" pitchFamily="34" charset="-122"/>
+                <a:cs typeface="Courier New" pitchFamily="34" charset="-120"/>
+              </a:rPr>
+              <a:t>:</a:t>
+            </a:r>
+            <a:pPr indent="0" marL="0">
+              <a:lnSpc>
+                <a:spcPct val="105000"/>
+              </a:lnSpc>
+              <a:buNone/>
+            </a:pPr>
+            <a:r>
+              <a:rPr lang="en-US" sz="1150" dirty="0">
+                <a:solidFill>
+                  <a:srgbClr val="CCCCCC"/>
+                </a:solidFill>
+                <a:latin typeface="Courier New" pitchFamily="34" charset="0"/>
+                <a:ea typeface="Courier New" pitchFamily="34" charset="-122"/>
+                <a:cs typeface="Courier New" pitchFamily="34" charset="-120"/>
+              </a:rPr>
+              <a:t> </a:t>
+            </a:r>
+            <a:pPr indent="0" marL="0">
+              <a:lnSpc>
+                <a:spcPct val="105000"/>
+              </a:lnSpc>
+              <a:buNone/>
+            </a:pPr>
+            <a:r>
+              <a:rPr lang="en-US" sz="1150" dirty="0">
+                <a:solidFill>
+                  <a:srgbClr val="4EC9B0"/>
+                </a:solidFill>
+                <a:latin typeface="Courier New" pitchFamily="34" charset="0"/>
+                <a:ea typeface="Courier New" pitchFamily="34" charset="-122"/>
+                <a:cs typeface="Courier New" pitchFamily="34" charset="-120"/>
+              </a:rPr>
+              <a:t>abap.char</a:t>
+            </a:r>
+            <a:pPr indent="0" marL="0">
+              <a:lnSpc>
+                <a:spcPct val="105000"/>
+              </a:lnSpc>
+              <a:buNone/>
+            </a:pPr>
+            <a:r>
+              <a:rPr lang="en-US" sz="1150" dirty="0">
+                <a:solidFill>
+                  <a:srgbClr val="CCCCCC"/>
                 </a:solidFill>
                 <a:latin typeface="Courier New" pitchFamily="34" charset="0"/>
                 <a:ea typeface="Courier New" pitchFamily="34" charset="-122"/>
@@ -13739,7 +14160,7 @@
             <a:r>
               <a:rPr lang="en-US" sz="1150" dirty="0">
                 <a:solidFill>
-                  <a:srgbClr val="FF9F80"/>
+                  <a:srgbClr val="B5CEA8"/>
                 </a:solidFill>
                 <a:latin typeface="Courier New" pitchFamily="34" charset="0"/>
                 <a:ea typeface="Courier New" pitchFamily="34" charset="-122"/>
@@ -13756,7 +14177,7 @@
             <a:r>
               <a:rPr lang="en-US" sz="1150" dirty="0">
                 <a:solidFill>
-                  <a:srgbClr val="E8ECEF"/>
+                  <a:srgbClr val="CCCCCC"/>
                 </a:solidFill>
                 <a:latin typeface="Courier New" pitchFamily="34" charset="0"/>
                 <a:ea typeface="Courier New" pitchFamily="34" charset="-122"/>
@@ -13776,7 +14197,24 @@
             <a:r>
               <a:rPr lang="en-US" sz="1150" dirty="0">
                 <a:solidFill>
-                  <a:srgbClr val="E8ECEF"/>
+                  <a:srgbClr val="6E7681"/>
+                </a:solidFill>
+                <a:latin typeface="Courier New" pitchFamily="34" charset="0"/>
+                <a:ea typeface="Courier New" pitchFamily="34" charset="-122"/>
+                <a:cs typeface="Courier New" pitchFamily="34" charset="-120"/>
+              </a:rPr>
+              <a:t> 8  </a:t>
+            </a:r>
+            <a:pPr indent="0" marL="0">
+              <a:lnSpc>
+                <a:spcPct val="105000"/>
+              </a:lnSpc>
+              <a:buNone/>
+            </a:pPr>
+            <a:r>
+              <a:rPr lang="en-US" sz="1150" dirty="0">
+                <a:solidFill>
+                  <a:srgbClr val="CCCCCC"/>
                 </a:solidFill>
                 <a:latin typeface="Courier New" pitchFamily="34" charset="0"/>
                 <a:ea typeface="Courier New" pitchFamily="34" charset="-122"/>
@@ -13793,7 +14231,7 @@
             <a:r>
               <a:rPr lang="en-US" sz="1150" dirty="0">
                 <a:solidFill>
-                  <a:srgbClr val="E8ECEF"/>
+                  <a:srgbClr val="CCCCCC"/>
                 </a:solidFill>
                 <a:latin typeface="Courier New" pitchFamily="34" charset="0"/>
                 <a:ea typeface="Courier New" pitchFamily="34" charset="-122"/>
@@ -13810,24 +14248,58 @@
             <a:r>
               <a:rPr lang="en-US" sz="1150" dirty="0">
                 <a:solidFill>
-                  <a:srgbClr val="E8ECEF"/>
-                </a:solidFill>
-                <a:latin typeface="Courier New" pitchFamily="34" charset="0"/>
-                <a:ea typeface="Courier New" pitchFamily="34" charset="-122"/>
-                <a:cs typeface="Courier New" pitchFamily="34" charset="-120"/>
-              </a:rPr>
-              <a:t>          : </a:t>
-            </a:r>
-            <a:pPr indent="0" marL="0">
-              <a:lnSpc>
-                <a:spcPct val="105000"/>
-              </a:lnSpc>
-              <a:buNone/>
-            </a:pPr>
-            <a:r>
-              <a:rPr lang="en-US" sz="1150" dirty="0">
-                <a:solidFill>
-                  <a:srgbClr val="E8ECEF"/>
+                  <a:srgbClr val="CCCCCC"/>
+                </a:solidFill>
+                <a:latin typeface="Courier New" pitchFamily="34" charset="0"/>
+                <a:ea typeface="Courier New" pitchFamily="34" charset="-122"/>
+                <a:cs typeface="Courier New" pitchFamily="34" charset="-120"/>
+              </a:rPr>
+              <a:t>          </a:t>
+            </a:r>
+            <a:pPr indent="0" marL="0">
+              <a:lnSpc>
+                <a:spcPct val="105000"/>
+              </a:lnSpc>
+              <a:buNone/>
+            </a:pPr>
+            <a:r>
+              <a:rPr lang="en-US" sz="1150" dirty="0">
+                <a:solidFill>
+                  <a:srgbClr val="CCCCCC"/>
+                </a:solidFill>
+                <a:latin typeface="Courier New" pitchFamily="34" charset="0"/>
+                <a:ea typeface="Courier New" pitchFamily="34" charset="-122"/>
+                <a:cs typeface="Courier New" pitchFamily="34" charset="-120"/>
+              </a:rPr>
+              <a:t>:</a:t>
+            </a:r>
+            <a:pPr indent="0" marL="0">
+              <a:lnSpc>
+                <a:spcPct val="105000"/>
+              </a:lnSpc>
+              <a:buNone/>
+            </a:pPr>
+            <a:r>
+              <a:rPr lang="en-US" sz="1150" dirty="0">
+                <a:solidFill>
+                  <a:srgbClr val="CCCCCC"/>
+                </a:solidFill>
+                <a:latin typeface="Courier New" pitchFamily="34" charset="0"/>
+                <a:ea typeface="Courier New" pitchFamily="34" charset="-122"/>
+                <a:cs typeface="Courier New" pitchFamily="34" charset="-120"/>
+              </a:rPr>
+              <a:t> </a:t>
+            </a:r>
+            <a:pPr indent="0" marL="0">
+              <a:lnSpc>
+                <a:spcPct val="105000"/>
+              </a:lnSpc>
+              <a:buNone/>
+            </a:pPr>
+            <a:r>
+              <a:rPr lang="en-US" sz="1150" dirty="0">
+                <a:solidFill>
+                  <a:srgbClr val="4EC9B0"/>
                 </a:solidFill>
                 <a:latin typeface="Courier New" pitchFamily="34" charset="0"/>
                 <a:ea typeface="Courier New" pitchFamily="34" charset="-122"/>
@@ -13844,7 +14316,7 @@
             <a:r>
               <a:rPr lang="en-US" sz="1150" dirty="0">
                 <a:solidFill>
-                  <a:srgbClr val="E8ECEF"/>
+                  <a:srgbClr val="CCCCCC"/>
                 </a:solidFill>
                 <a:latin typeface="Courier New" pitchFamily="34" charset="0"/>
                 <a:ea typeface="Courier New" pitchFamily="34" charset="-122"/>
@@ -13864,7 +14336,24 @@
             <a:r>
               <a:rPr lang="en-US" sz="1150" dirty="0">
                 <a:solidFill>
-                  <a:srgbClr val="E8ECEF"/>
+                  <a:srgbClr val="6E7681"/>
+                </a:solidFill>
+                <a:latin typeface="Courier New" pitchFamily="34" charset="0"/>
+                <a:ea typeface="Courier New" pitchFamily="34" charset="-122"/>
+                <a:cs typeface="Courier New" pitchFamily="34" charset="-120"/>
+              </a:rPr>
+              <a:t> 9  </a:t>
+            </a:r>
+            <a:pPr indent="0" marL="0">
+              <a:lnSpc>
+                <a:spcPct val="105000"/>
+              </a:lnSpc>
+              <a:buNone/>
+            </a:pPr>
+            <a:r>
+              <a:rPr lang="en-US" sz="1150" dirty="0">
+                <a:solidFill>
+                  <a:srgbClr val="CCCCCC"/>
                 </a:solidFill>
                 <a:latin typeface="Courier New" pitchFamily="34" charset="0"/>
                 <a:ea typeface="Courier New" pitchFamily="34" charset="-122"/>
@@ -13881,7 +14370,7 @@
             <a:r>
               <a:rPr lang="en-US" sz="1150" dirty="0">
                 <a:solidFill>
-                  <a:srgbClr val="E8ECEF"/>
+                  <a:srgbClr val="CCCCCC"/>
                 </a:solidFill>
                 <a:latin typeface="Courier New" pitchFamily="34" charset="0"/>
                 <a:ea typeface="Courier New" pitchFamily="34" charset="-122"/>
@@ -13898,75 +14387,75 @@
             <a:r>
               <a:rPr lang="en-US" sz="1150" dirty="0">
                 <a:solidFill>
-                  <a:srgbClr val="E8ECEF"/>
-                </a:solidFill>
-                <a:latin typeface="Courier New" pitchFamily="34" charset="0"/>
-                <a:ea typeface="Courier New" pitchFamily="34" charset="-122"/>
-                <a:cs typeface="Courier New" pitchFamily="34" charset="-120"/>
-              </a:rPr>
-              <a:t>         : </a:t>
-            </a:r>
-            <a:pPr indent="0" marL="0">
-              <a:lnSpc>
-                <a:spcPct val="105000"/>
-              </a:lnSpc>
-              <a:buNone/>
-            </a:pPr>
-            <a:r>
-              <a:rPr lang="en-US" sz="1150" dirty="0">
-                <a:solidFill>
-                  <a:srgbClr val="E8ECEF"/>
-                </a:solidFill>
-                <a:latin typeface="Courier New" pitchFamily="34" charset="0"/>
-                <a:ea typeface="Courier New" pitchFamily="34" charset="-122"/>
-                <a:cs typeface="Courier New" pitchFamily="34" charset="-120"/>
-              </a:rPr>
-              <a:t>abap</a:t>
-            </a:r>
-            <a:pPr indent="0" marL="0">
-              <a:lnSpc>
-                <a:spcPct val="105000"/>
-              </a:lnSpc>
-              <a:buNone/>
-            </a:pPr>
-            <a:r>
-              <a:rPr lang="en-US" sz="1150" dirty="0">
-                <a:solidFill>
-                  <a:srgbClr val="E8ECEF"/>
-                </a:solidFill>
-                <a:latin typeface="Courier New" pitchFamily="34" charset="0"/>
-                <a:ea typeface="Courier New" pitchFamily="34" charset="-122"/>
-                <a:cs typeface="Courier New" pitchFamily="34" charset="-120"/>
-              </a:rPr>
-              <a:t>.</a:t>
-            </a:r>
-            <a:pPr indent="0" marL="0">
-              <a:lnSpc>
-                <a:spcPct val="105000"/>
-              </a:lnSpc>
-              <a:buNone/>
-            </a:pPr>
-            <a:r>
-              <a:rPr lang="en-US" sz="1150" dirty="0">
-                <a:solidFill>
-                  <a:srgbClr val="E8ECEF"/>
-                </a:solidFill>
-                <a:latin typeface="Courier New" pitchFamily="34" charset="0"/>
-                <a:ea typeface="Courier New" pitchFamily="34" charset="-122"/>
-                <a:cs typeface="Courier New" pitchFamily="34" charset="-120"/>
-              </a:rPr>
-              <a:t>char</a:t>
-            </a:r>
-            <a:pPr indent="0" marL="0">
-              <a:lnSpc>
-                <a:spcPct val="105000"/>
-              </a:lnSpc>
-              <a:buNone/>
-            </a:pPr>
-            <a:r>
-              <a:rPr lang="en-US" sz="1150" dirty="0">
-                <a:solidFill>
-                  <a:srgbClr val="E8ECEF"/>
+                  <a:srgbClr val="CCCCCC"/>
+                </a:solidFill>
+                <a:latin typeface="Courier New" pitchFamily="34" charset="0"/>
+                <a:ea typeface="Courier New" pitchFamily="34" charset="-122"/>
+                <a:cs typeface="Courier New" pitchFamily="34" charset="-120"/>
+              </a:rPr>
+              <a:t>         </a:t>
+            </a:r>
+            <a:pPr indent="0" marL="0">
+              <a:lnSpc>
+                <a:spcPct val="105000"/>
+              </a:lnSpc>
+              <a:buNone/>
+            </a:pPr>
+            <a:r>
+              <a:rPr lang="en-US" sz="1150" dirty="0">
+                <a:solidFill>
+                  <a:srgbClr val="CCCCCC"/>
+                </a:solidFill>
+                <a:latin typeface="Courier New" pitchFamily="34" charset="0"/>
+                <a:ea typeface="Courier New" pitchFamily="34" charset="-122"/>
+                <a:cs typeface="Courier New" pitchFamily="34" charset="-120"/>
+              </a:rPr>
+              <a:t>:</a:t>
+            </a:r>
+            <a:pPr indent="0" marL="0">
+              <a:lnSpc>
+                <a:spcPct val="105000"/>
+              </a:lnSpc>
+              <a:buNone/>
+            </a:pPr>
+            <a:r>
+              <a:rPr lang="en-US" sz="1150" dirty="0">
+                <a:solidFill>
+                  <a:srgbClr val="CCCCCC"/>
+                </a:solidFill>
+                <a:latin typeface="Courier New" pitchFamily="34" charset="0"/>
+                <a:ea typeface="Courier New" pitchFamily="34" charset="-122"/>
+                <a:cs typeface="Courier New" pitchFamily="34" charset="-120"/>
+              </a:rPr>
+              <a:t> </a:t>
+            </a:r>
+            <a:pPr indent="0" marL="0">
+              <a:lnSpc>
+                <a:spcPct val="105000"/>
+              </a:lnSpc>
+              <a:buNone/>
+            </a:pPr>
+            <a:r>
+              <a:rPr lang="en-US" sz="1150" dirty="0">
+                <a:solidFill>
+                  <a:srgbClr val="4EC9B0"/>
+                </a:solidFill>
+                <a:latin typeface="Courier New" pitchFamily="34" charset="0"/>
+                <a:ea typeface="Courier New" pitchFamily="34" charset="-122"/>
+                <a:cs typeface="Courier New" pitchFamily="34" charset="-120"/>
+              </a:rPr>
+              <a:t>abap.char</a:t>
+            </a:r>
+            <a:pPr indent="0" marL="0">
+              <a:lnSpc>
+                <a:spcPct val="105000"/>
+              </a:lnSpc>
+              <a:buNone/>
+            </a:pPr>
+            <a:r>
+              <a:rPr lang="en-US" sz="1150" dirty="0">
+                <a:solidFill>
+                  <a:srgbClr val="CCCCCC"/>
                 </a:solidFill>
                 <a:latin typeface="Courier New" pitchFamily="34" charset="0"/>
                 <a:ea typeface="Courier New" pitchFamily="34" charset="-122"/>
@@ -13983,7 +14472,7 @@
             <a:r>
               <a:rPr lang="en-US" sz="1150" dirty="0">
                 <a:solidFill>
-                  <a:srgbClr val="FF9F80"/>
+                  <a:srgbClr val="B5CEA8"/>
                 </a:solidFill>
                 <a:latin typeface="Courier New" pitchFamily="34" charset="0"/>
                 <a:ea typeface="Courier New" pitchFamily="34" charset="-122"/>
@@ -14000,7 +14489,7 @@
             <a:r>
               <a:rPr lang="en-US" sz="1150" dirty="0">
                 <a:solidFill>
-                  <a:srgbClr val="E8ECEF"/>
+                  <a:srgbClr val="CCCCCC"/>
                 </a:solidFill>
                 <a:latin typeface="Courier New" pitchFamily="34" charset="0"/>
                 <a:ea typeface="Courier New" pitchFamily="34" charset="-122"/>
@@ -14020,7 +14509,24 @@
             <a:r>
               <a:rPr lang="en-US" sz="1150" dirty="0">
                 <a:solidFill>
-                  <a:srgbClr val="E8ECEF"/>
+                  <a:srgbClr val="6E7681"/>
+                </a:solidFill>
+                <a:latin typeface="Courier New" pitchFamily="34" charset="0"/>
+                <a:ea typeface="Courier New" pitchFamily="34" charset="-122"/>
+                <a:cs typeface="Courier New" pitchFamily="34" charset="-120"/>
+              </a:rPr>
+              <a:t>10  </a:t>
+            </a:r>
+            <a:pPr indent="0" marL="0">
+              <a:lnSpc>
+                <a:spcPct val="105000"/>
+              </a:lnSpc>
+              <a:buNone/>
+            </a:pPr>
+            <a:r>
+              <a:rPr lang="en-US" sz="1150" dirty="0">
+                <a:solidFill>
+                  <a:srgbClr val="CCCCCC"/>
                 </a:solidFill>
                 <a:latin typeface="Courier New" pitchFamily="34" charset="0"/>
                 <a:ea typeface="Courier New" pitchFamily="34" charset="-122"/>
@@ -14037,7 +14543,7 @@
             <a:r>
               <a:rPr lang="en-US" sz="1150" dirty="0">
                 <a:solidFill>
-                  <a:srgbClr val="E8ECEF"/>
+                  <a:srgbClr val="CCCCCC"/>
                 </a:solidFill>
                 <a:latin typeface="Courier New" pitchFamily="34" charset="0"/>
                 <a:ea typeface="Courier New" pitchFamily="34" charset="-122"/>
@@ -14054,75 +14560,75 @@
             <a:r>
               <a:rPr lang="en-US" sz="1150" dirty="0">
                 <a:solidFill>
-                  <a:srgbClr val="E8ECEF"/>
-                </a:solidFill>
-                <a:latin typeface="Courier New" pitchFamily="34" charset="0"/>
-                <a:ea typeface="Courier New" pitchFamily="34" charset="-122"/>
-                <a:cs typeface="Courier New" pitchFamily="34" charset="-120"/>
-              </a:rPr>
-              <a:t>      : </a:t>
-            </a:r>
-            <a:pPr indent="0" marL="0">
-              <a:lnSpc>
-                <a:spcPct val="105000"/>
-              </a:lnSpc>
-              <a:buNone/>
-            </a:pPr>
-            <a:r>
-              <a:rPr lang="en-US" sz="1150" dirty="0">
-                <a:solidFill>
-                  <a:srgbClr val="E8ECEF"/>
-                </a:solidFill>
-                <a:latin typeface="Courier New" pitchFamily="34" charset="0"/>
-                <a:ea typeface="Courier New" pitchFamily="34" charset="-122"/>
-                <a:cs typeface="Courier New" pitchFamily="34" charset="-120"/>
-              </a:rPr>
-              <a:t>abap</a:t>
-            </a:r>
-            <a:pPr indent="0" marL="0">
-              <a:lnSpc>
-                <a:spcPct val="105000"/>
-              </a:lnSpc>
-              <a:buNone/>
-            </a:pPr>
-            <a:r>
-              <a:rPr lang="en-US" sz="1150" dirty="0">
-                <a:solidFill>
-                  <a:srgbClr val="E8ECEF"/>
-                </a:solidFill>
-                <a:latin typeface="Courier New" pitchFamily="34" charset="0"/>
-                <a:ea typeface="Courier New" pitchFamily="34" charset="-122"/>
-                <a:cs typeface="Courier New" pitchFamily="34" charset="-120"/>
-              </a:rPr>
-              <a:t>.</a:t>
-            </a:r>
-            <a:pPr indent="0" marL="0">
-              <a:lnSpc>
-                <a:spcPct val="105000"/>
-              </a:lnSpc>
-              <a:buNone/>
-            </a:pPr>
-            <a:r>
-              <a:rPr lang="en-US" sz="1150" dirty="0">
-                <a:solidFill>
-                  <a:srgbClr val="E8ECEF"/>
-                </a:solidFill>
-                <a:latin typeface="Courier New" pitchFamily="34" charset="0"/>
-                <a:ea typeface="Courier New" pitchFamily="34" charset="-122"/>
-                <a:cs typeface="Courier New" pitchFamily="34" charset="-120"/>
-              </a:rPr>
-              <a:t>char</a:t>
-            </a:r>
-            <a:pPr indent="0" marL="0">
-              <a:lnSpc>
-                <a:spcPct val="105000"/>
-              </a:lnSpc>
-              <a:buNone/>
-            </a:pPr>
-            <a:r>
-              <a:rPr lang="en-US" sz="1150" dirty="0">
-                <a:solidFill>
-                  <a:srgbClr val="E8ECEF"/>
+                  <a:srgbClr val="CCCCCC"/>
+                </a:solidFill>
+                <a:latin typeface="Courier New" pitchFamily="34" charset="0"/>
+                <a:ea typeface="Courier New" pitchFamily="34" charset="-122"/>
+                <a:cs typeface="Courier New" pitchFamily="34" charset="-120"/>
+              </a:rPr>
+              <a:t>      </a:t>
+            </a:r>
+            <a:pPr indent="0" marL="0">
+              <a:lnSpc>
+                <a:spcPct val="105000"/>
+              </a:lnSpc>
+              <a:buNone/>
+            </a:pPr>
+            <a:r>
+              <a:rPr lang="en-US" sz="1150" dirty="0">
+                <a:solidFill>
+                  <a:srgbClr val="CCCCCC"/>
+                </a:solidFill>
+                <a:latin typeface="Courier New" pitchFamily="34" charset="0"/>
+                <a:ea typeface="Courier New" pitchFamily="34" charset="-122"/>
+                <a:cs typeface="Courier New" pitchFamily="34" charset="-120"/>
+              </a:rPr>
+              <a:t>:</a:t>
+            </a:r>
+            <a:pPr indent="0" marL="0">
+              <a:lnSpc>
+                <a:spcPct val="105000"/>
+              </a:lnSpc>
+              <a:buNone/>
+            </a:pPr>
+            <a:r>
+              <a:rPr lang="en-US" sz="1150" dirty="0">
+                <a:solidFill>
+                  <a:srgbClr val="CCCCCC"/>
+                </a:solidFill>
+                <a:latin typeface="Courier New" pitchFamily="34" charset="0"/>
+                <a:ea typeface="Courier New" pitchFamily="34" charset="-122"/>
+                <a:cs typeface="Courier New" pitchFamily="34" charset="-120"/>
+              </a:rPr>
+              <a:t> </a:t>
+            </a:r>
+            <a:pPr indent="0" marL="0">
+              <a:lnSpc>
+                <a:spcPct val="105000"/>
+              </a:lnSpc>
+              <a:buNone/>
+            </a:pPr>
+            <a:r>
+              <a:rPr lang="en-US" sz="1150" dirty="0">
+                <a:solidFill>
+                  <a:srgbClr val="4EC9B0"/>
+                </a:solidFill>
+                <a:latin typeface="Courier New" pitchFamily="34" charset="0"/>
+                <a:ea typeface="Courier New" pitchFamily="34" charset="-122"/>
+                <a:cs typeface="Courier New" pitchFamily="34" charset="-120"/>
+              </a:rPr>
+              <a:t>abap.char</a:t>
+            </a:r>
+            <a:pPr indent="0" marL="0">
+              <a:lnSpc>
+                <a:spcPct val="105000"/>
+              </a:lnSpc>
+              <a:buNone/>
+            </a:pPr>
+            <a:r>
+              <a:rPr lang="en-US" sz="1150" dirty="0">
+                <a:solidFill>
+                  <a:srgbClr val="CCCCCC"/>
                 </a:solidFill>
                 <a:latin typeface="Courier New" pitchFamily="34" charset="0"/>
                 <a:ea typeface="Courier New" pitchFamily="34" charset="-122"/>
@@ -14139,7 +14645,7 @@
             <a:r>
               <a:rPr lang="en-US" sz="1150" dirty="0">
                 <a:solidFill>
-                  <a:srgbClr val="FF9F80"/>
+                  <a:srgbClr val="B5CEA8"/>
                 </a:solidFill>
                 <a:latin typeface="Courier New" pitchFamily="34" charset="0"/>
                 <a:ea typeface="Courier New" pitchFamily="34" charset="-122"/>
@@ -14156,7 +14662,7 @@
             <a:r>
               <a:rPr lang="en-US" sz="1150" dirty="0">
                 <a:solidFill>
-                  <a:srgbClr val="E8ECEF"/>
+                  <a:srgbClr val="CCCCCC"/>
                 </a:solidFill>
                 <a:latin typeface="Courier New" pitchFamily="34" charset="0"/>
                 <a:ea typeface="Courier New" pitchFamily="34" charset="-122"/>
@@ -14176,7 +14682,24 @@
             <a:r>
               <a:rPr lang="en-US" sz="1150" dirty="0">
                 <a:solidFill>
-                  <a:srgbClr val="E8ECEF"/>
+                  <a:srgbClr val="6E7681"/>
+                </a:solidFill>
+                <a:latin typeface="Courier New" pitchFamily="34" charset="0"/>
+                <a:ea typeface="Courier New" pitchFamily="34" charset="-122"/>
+                <a:cs typeface="Courier New" pitchFamily="34" charset="-120"/>
+              </a:rPr>
+              <a:t>11  </a:t>
+            </a:r>
+            <a:pPr indent="0" marL="0">
+              <a:lnSpc>
+                <a:spcPct val="105000"/>
+              </a:lnSpc>
+              <a:buNone/>
+            </a:pPr>
+            <a:r>
+              <a:rPr lang="en-US" sz="1150" dirty="0">
+                <a:solidFill>
+                  <a:srgbClr val="CCCCCC"/>
                 </a:solidFill>
                 <a:latin typeface="Courier New" pitchFamily="34" charset="0"/>
                 <a:ea typeface="Courier New" pitchFamily="34" charset="-122"/>
@@ -14193,7 +14716,7 @@
             <a:r>
               <a:rPr lang="en-US" sz="1150" dirty="0">
                 <a:solidFill>
-                  <a:srgbClr val="E8ECEF"/>
+                  <a:srgbClr val="CCCCCC"/>
                 </a:solidFill>
                 <a:latin typeface="Courier New" pitchFamily="34" charset="0"/>
                 <a:ea typeface="Courier New" pitchFamily="34" charset="-122"/>
@@ -14210,75 +14733,75 @@
             <a:r>
               <a:rPr lang="en-US" sz="1150" dirty="0">
                 <a:solidFill>
-                  <a:srgbClr val="E8ECEF"/>
-                </a:solidFill>
-                <a:latin typeface="Courier New" pitchFamily="34" charset="0"/>
-                <a:ea typeface="Courier New" pitchFamily="34" charset="-122"/>
-                <a:cs typeface="Courier New" pitchFamily="34" charset="-120"/>
-              </a:rPr>
-              <a:t>              : </a:t>
-            </a:r>
-            <a:pPr indent="0" marL="0">
-              <a:lnSpc>
-                <a:spcPct val="105000"/>
-              </a:lnSpc>
-              <a:buNone/>
-            </a:pPr>
-            <a:r>
-              <a:rPr lang="en-US" sz="1150" dirty="0">
-                <a:solidFill>
-                  <a:srgbClr val="E8ECEF"/>
-                </a:solidFill>
-                <a:latin typeface="Courier New" pitchFamily="34" charset="0"/>
-                <a:ea typeface="Courier New" pitchFamily="34" charset="-122"/>
-                <a:cs typeface="Courier New" pitchFamily="34" charset="-120"/>
-              </a:rPr>
-              <a:t>abap</a:t>
-            </a:r>
-            <a:pPr indent="0" marL="0">
-              <a:lnSpc>
-                <a:spcPct val="105000"/>
-              </a:lnSpc>
-              <a:buNone/>
-            </a:pPr>
-            <a:r>
-              <a:rPr lang="en-US" sz="1150" dirty="0">
-                <a:solidFill>
-                  <a:srgbClr val="E8ECEF"/>
-                </a:solidFill>
-                <a:latin typeface="Courier New" pitchFamily="34" charset="0"/>
-                <a:ea typeface="Courier New" pitchFamily="34" charset="-122"/>
-                <a:cs typeface="Courier New" pitchFamily="34" charset="-120"/>
-              </a:rPr>
-              <a:t>.</a:t>
-            </a:r>
-            <a:pPr indent="0" marL="0">
-              <a:lnSpc>
-                <a:spcPct val="105000"/>
-              </a:lnSpc>
-              <a:buNone/>
-            </a:pPr>
-            <a:r>
-              <a:rPr lang="en-US" sz="1150" dirty="0">
-                <a:solidFill>
-                  <a:srgbClr val="E8ECEF"/>
-                </a:solidFill>
-                <a:latin typeface="Courier New" pitchFamily="34" charset="0"/>
-                <a:ea typeface="Courier New" pitchFamily="34" charset="-122"/>
-                <a:cs typeface="Courier New" pitchFamily="34" charset="-120"/>
-              </a:rPr>
-              <a:t>cuky</a:t>
-            </a:r>
-            <a:pPr indent="0" marL="0">
-              <a:lnSpc>
-                <a:spcPct val="105000"/>
-              </a:lnSpc>
-              <a:buNone/>
-            </a:pPr>
-            <a:r>
-              <a:rPr lang="en-US" sz="1150" dirty="0">
-                <a:solidFill>
-                  <a:srgbClr val="E8ECEF"/>
+                  <a:srgbClr val="CCCCCC"/>
+                </a:solidFill>
+                <a:latin typeface="Courier New" pitchFamily="34" charset="0"/>
+                <a:ea typeface="Courier New" pitchFamily="34" charset="-122"/>
+                <a:cs typeface="Courier New" pitchFamily="34" charset="-120"/>
+              </a:rPr>
+              <a:t>              </a:t>
+            </a:r>
+            <a:pPr indent="0" marL="0">
+              <a:lnSpc>
+                <a:spcPct val="105000"/>
+              </a:lnSpc>
+              <a:buNone/>
+            </a:pPr>
+            <a:r>
+              <a:rPr lang="en-US" sz="1150" dirty="0">
+                <a:solidFill>
+                  <a:srgbClr val="CCCCCC"/>
+                </a:solidFill>
+                <a:latin typeface="Courier New" pitchFamily="34" charset="0"/>
+                <a:ea typeface="Courier New" pitchFamily="34" charset="-122"/>
+                <a:cs typeface="Courier New" pitchFamily="34" charset="-120"/>
+              </a:rPr>
+              <a:t>:</a:t>
+            </a:r>
+            <a:pPr indent="0" marL="0">
+              <a:lnSpc>
+                <a:spcPct val="105000"/>
+              </a:lnSpc>
+              <a:buNone/>
+            </a:pPr>
+            <a:r>
+              <a:rPr lang="en-US" sz="1150" dirty="0">
+                <a:solidFill>
+                  <a:srgbClr val="CCCCCC"/>
+                </a:solidFill>
+                <a:latin typeface="Courier New" pitchFamily="34" charset="0"/>
+                <a:ea typeface="Courier New" pitchFamily="34" charset="-122"/>
+                <a:cs typeface="Courier New" pitchFamily="34" charset="-120"/>
+              </a:rPr>
+              <a:t> </a:t>
+            </a:r>
+            <a:pPr indent="0" marL="0">
+              <a:lnSpc>
+                <a:spcPct val="105000"/>
+              </a:lnSpc>
+              <a:buNone/>
+            </a:pPr>
+            <a:r>
+              <a:rPr lang="en-US" sz="1150" dirty="0">
+                <a:solidFill>
+                  <a:srgbClr val="4EC9B0"/>
+                </a:solidFill>
+                <a:latin typeface="Courier New" pitchFamily="34" charset="0"/>
+                <a:ea typeface="Courier New" pitchFamily="34" charset="-122"/>
+                <a:cs typeface="Courier New" pitchFamily="34" charset="-120"/>
+              </a:rPr>
+              <a:t>abap.cuky</a:t>
+            </a:r>
+            <a:pPr indent="0" marL="0">
+              <a:lnSpc>
+                <a:spcPct val="105000"/>
+              </a:lnSpc>
+              <a:buNone/>
+            </a:pPr>
+            <a:r>
+              <a:rPr lang="en-US" sz="1150" dirty="0">
+                <a:solidFill>
+                  <a:srgbClr val="CCCCCC"/>
                 </a:solidFill>
                 <a:latin typeface="Courier New" pitchFamily="34" charset="0"/>
                 <a:ea typeface="Courier New" pitchFamily="34" charset="-122"/>
@@ -14298,7 +14821,24 @@
             <a:r>
               <a:rPr lang="en-US" sz="1150" dirty="0">
                 <a:solidFill>
-                  <a:srgbClr val="E8ECEF"/>
+                  <a:srgbClr val="6E7681"/>
+                </a:solidFill>
+                <a:latin typeface="Courier New" pitchFamily="34" charset="0"/>
+                <a:ea typeface="Courier New" pitchFamily="34" charset="-122"/>
+                <a:cs typeface="Courier New" pitchFamily="34" charset="-120"/>
+              </a:rPr>
+              <a:t>12  </a:t>
+            </a:r>
+            <a:pPr indent="0" marL="0">
+              <a:lnSpc>
+                <a:spcPct val="105000"/>
+              </a:lnSpc>
+              <a:buNone/>
+            </a:pPr>
+            <a:r>
+              <a:rPr lang="en-US" sz="1150" dirty="0">
+                <a:solidFill>
+                  <a:srgbClr val="CCCCCC"/>
                 </a:solidFill>
                 <a:latin typeface="Courier New" pitchFamily="34" charset="0"/>
                 <a:ea typeface="Courier New" pitchFamily="34" charset="-122"/>
@@ -14315,7 +14855,7 @@
             <a:r>
               <a:rPr lang="en-US" sz="1150" dirty="0">
                 <a:solidFill>
-                  <a:srgbClr val="F0AB00"/>
+                  <a:srgbClr val="DCDCAA"/>
                 </a:solidFill>
                 <a:latin typeface="Courier New" pitchFamily="34" charset="0"/>
                 <a:ea typeface="Courier New" pitchFamily="34" charset="-122"/>
@@ -14332,24 +14872,58 @@
             <a:r>
               <a:rPr lang="en-US" sz="1150" dirty="0">
                 <a:solidFill>
-                  <a:srgbClr val="E8ECEF"/>
-                </a:solidFill>
-                <a:latin typeface="Courier New" pitchFamily="34" charset="0"/>
-                <a:ea typeface="Courier New" pitchFamily="34" charset="-122"/>
-                <a:cs typeface="Courier New" pitchFamily="34" charset="-120"/>
-              </a:rPr>
-              <a:t> : </a:t>
-            </a:r>
-            <a:pPr indent="0" marL="0">
-              <a:lnSpc>
-                <a:spcPct val="105000"/>
-              </a:lnSpc>
-              <a:buNone/>
-            </a:pPr>
-            <a:r>
-              <a:rPr lang="en-US" sz="1150" dirty="0">
-                <a:solidFill>
-                  <a:srgbClr val="8FD694"/>
+                  <a:srgbClr val="CCCCCC"/>
+                </a:solidFill>
+                <a:latin typeface="Courier New" pitchFamily="34" charset="0"/>
+                <a:ea typeface="Courier New" pitchFamily="34" charset="-122"/>
+                <a:cs typeface="Courier New" pitchFamily="34" charset="-120"/>
+              </a:rPr>
+              <a:t> </a:t>
+            </a:r>
+            <a:pPr indent="0" marL="0">
+              <a:lnSpc>
+                <a:spcPct val="105000"/>
+              </a:lnSpc>
+              <a:buNone/>
+            </a:pPr>
+            <a:r>
+              <a:rPr lang="en-US" sz="1150" dirty="0">
+                <a:solidFill>
+                  <a:srgbClr val="CCCCCC"/>
+                </a:solidFill>
+                <a:latin typeface="Courier New" pitchFamily="34" charset="0"/>
+                <a:ea typeface="Courier New" pitchFamily="34" charset="-122"/>
+                <a:cs typeface="Courier New" pitchFamily="34" charset="-120"/>
+              </a:rPr>
+              <a:t>:</a:t>
+            </a:r>
+            <a:pPr indent="0" marL="0">
+              <a:lnSpc>
+                <a:spcPct val="105000"/>
+              </a:lnSpc>
+              <a:buNone/>
+            </a:pPr>
+            <a:r>
+              <a:rPr lang="en-US" sz="1150" dirty="0">
+                <a:solidFill>
+                  <a:srgbClr val="CCCCCC"/>
+                </a:solidFill>
+                <a:latin typeface="Courier New" pitchFamily="34" charset="0"/>
+                <a:ea typeface="Courier New" pitchFamily="34" charset="-122"/>
+                <a:cs typeface="Courier New" pitchFamily="34" charset="-120"/>
+              </a:rPr>
+              <a:t> </a:t>
+            </a:r>
+            <a:pPr indent="0" marL="0">
+              <a:lnSpc>
+                <a:spcPct val="105000"/>
+              </a:lnSpc>
+              <a:buNone/>
+            </a:pPr>
+            <a:r>
+              <a:rPr lang="en-US" sz="1150" dirty="0">
+                <a:solidFill>
+                  <a:srgbClr val="CE9178"/>
                 </a:solidFill>
                 <a:latin typeface="Courier New" pitchFamily="34" charset="0"/>
                 <a:ea typeface="Courier New" pitchFamily="34" charset="-122"/>
@@ -14369,7 +14943,24 @@
             <a:r>
               <a:rPr lang="en-US" sz="1150" dirty="0">
                 <a:solidFill>
-                  <a:srgbClr val="E8ECEF"/>
+                  <a:srgbClr val="6E7681"/>
+                </a:solidFill>
+                <a:latin typeface="Courier New" pitchFamily="34" charset="0"/>
+                <a:ea typeface="Courier New" pitchFamily="34" charset="-122"/>
+                <a:cs typeface="Courier New" pitchFamily="34" charset="-120"/>
+              </a:rPr>
+              <a:t>13  </a:t>
+            </a:r>
+            <a:pPr indent="0" marL="0">
+              <a:lnSpc>
+                <a:spcPct val="105000"/>
+              </a:lnSpc>
+              <a:buNone/>
+            </a:pPr>
+            <a:r>
+              <a:rPr lang="en-US" sz="1150" dirty="0">
+                <a:solidFill>
+                  <a:srgbClr val="CCCCCC"/>
                 </a:solidFill>
                 <a:latin typeface="Courier New" pitchFamily="34" charset="0"/>
                 <a:ea typeface="Courier New" pitchFamily="34" charset="-122"/>
@@ -14386,7 +14977,7 @@
             <a:r>
               <a:rPr lang="en-US" sz="1150" dirty="0">
                 <a:solidFill>
-                  <a:srgbClr val="E8ECEF"/>
+                  <a:srgbClr val="CCCCCC"/>
                 </a:solidFill>
                 <a:latin typeface="Courier New" pitchFamily="34" charset="0"/>
                 <a:ea typeface="Courier New" pitchFamily="34" charset="-122"/>
@@ -14403,75 +14994,75 @@
             <a:r>
               <a:rPr lang="en-US" sz="1150" dirty="0">
                 <a:solidFill>
-                  <a:srgbClr val="E8ECEF"/>
-                </a:solidFill>
-                <a:latin typeface="Courier New" pitchFamily="34" charset="0"/>
-                <a:ea typeface="Courier New" pitchFamily="34" charset="-122"/>
-                <a:cs typeface="Courier New" pitchFamily="34" charset="-120"/>
-              </a:rPr>
-              <a:t>           : </a:t>
-            </a:r>
-            <a:pPr indent="0" marL="0">
-              <a:lnSpc>
-                <a:spcPct val="105000"/>
-              </a:lnSpc>
-              <a:buNone/>
-            </a:pPr>
-            <a:r>
-              <a:rPr lang="en-US" sz="1150" dirty="0">
-                <a:solidFill>
-                  <a:srgbClr val="E8ECEF"/>
-                </a:solidFill>
-                <a:latin typeface="Courier New" pitchFamily="34" charset="0"/>
-                <a:ea typeface="Courier New" pitchFamily="34" charset="-122"/>
-                <a:cs typeface="Courier New" pitchFamily="34" charset="-120"/>
-              </a:rPr>
-              <a:t>abap</a:t>
-            </a:r>
-            <a:pPr indent="0" marL="0">
-              <a:lnSpc>
-                <a:spcPct val="105000"/>
-              </a:lnSpc>
-              <a:buNone/>
-            </a:pPr>
-            <a:r>
-              <a:rPr lang="en-US" sz="1150" dirty="0">
-                <a:solidFill>
-                  <a:srgbClr val="E8ECEF"/>
-                </a:solidFill>
-                <a:latin typeface="Courier New" pitchFamily="34" charset="0"/>
-                <a:ea typeface="Courier New" pitchFamily="34" charset="-122"/>
-                <a:cs typeface="Courier New" pitchFamily="34" charset="-120"/>
-              </a:rPr>
-              <a:t>.</a:t>
-            </a:r>
-            <a:pPr indent="0" marL="0">
-              <a:lnSpc>
-                <a:spcPct val="105000"/>
-              </a:lnSpc>
-              <a:buNone/>
-            </a:pPr>
-            <a:r>
-              <a:rPr lang="en-US" sz="1150" dirty="0">
-                <a:solidFill>
-                  <a:srgbClr val="E8ECEF"/>
-                </a:solidFill>
-                <a:latin typeface="Courier New" pitchFamily="34" charset="0"/>
-                <a:ea typeface="Courier New" pitchFamily="34" charset="-122"/>
-                <a:cs typeface="Courier New" pitchFamily="34" charset="-120"/>
-              </a:rPr>
-              <a:t>curr</a:t>
-            </a:r>
-            <a:pPr indent="0" marL="0">
-              <a:lnSpc>
-                <a:spcPct val="105000"/>
-              </a:lnSpc>
-              <a:buNone/>
-            </a:pPr>
-            <a:r>
-              <a:rPr lang="en-US" sz="1150" dirty="0">
-                <a:solidFill>
-                  <a:srgbClr val="E8ECEF"/>
+                  <a:srgbClr val="CCCCCC"/>
+                </a:solidFill>
+                <a:latin typeface="Courier New" pitchFamily="34" charset="0"/>
+                <a:ea typeface="Courier New" pitchFamily="34" charset="-122"/>
+                <a:cs typeface="Courier New" pitchFamily="34" charset="-120"/>
+              </a:rPr>
+              <a:t>           </a:t>
+            </a:r>
+            <a:pPr indent="0" marL="0">
+              <a:lnSpc>
+                <a:spcPct val="105000"/>
+              </a:lnSpc>
+              <a:buNone/>
+            </a:pPr>
+            <a:r>
+              <a:rPr lang="en-US" sz="1150" dirty="0">
+                <a:solidFill>
+                  <a:srgbClr val="CCCCCC"/>
+                </a:solidFill>
+                <a:latin typeface="Courier New" pitchFamily="34" charset="0"/>
+                <a:ea typeface="Courier New" pitchFamily="34" charset="-122"/>
+                <a:cs typeface="Courier New" pitchFamily="34" charset="-120"/>
+              </a:rPr>
+              <a:t>:</a:t>
+            </a:r>
+            <a:pPr indent="0" marL="0">
+              <a:lnSpc>
+                <a:spcPct val="105000"/>
+              </a:lnSpc>
+              <a:buNone/>
+            </a:pPr>
+            <a:r>
+              <a:rPr lang="en-US" sz="1150" dirty="0">
+                <a:solidFill>
+                  <a:srgbClr val="CCCCCC"/>
+                </a:solidFill>
+                <a:latin typeface="Courier New" pitchFamily="34" charset="0"/>
+                <a:ea typeface="Courier New" pitchFamily="34" charset="-122"/>
+                <a:cs typeface="Courier New" pitchFamily="34" charset="-120"/>
+              </a:rPr>
+              <a:t> </a:t>
+            </a:r>
+            <a:pPr indent="0" marL="0">
+              <a:lnSpc>
+                <a:spcPct val="105000"/>
+              </a:lnSpc>
+              <a:buNone/>
+            </a:pPr>
+            <a:r>
+              <a:rPr lang="en-US" sz="1150" dirty="0">
+                <a:solidFill>
+                  <a:srgbClr val="4EC9B0"/>
+                </a:solidFill>
+                <a:latin typeface="Courier New" pitchFamily="34" charset="0"/>
+                <a:ea typeface="Courier New" pitchFamily="34" charset="-122"/>
+                <a:cs typeface="Courier New" pitchFamily="34" charset="-120"/>
+              </a:rPr>
+              <a:t>abap.curr</a:t>
+            </a:r>
+            <a:pPr indent="0" marL="0">
+              <a:lnSpc>
+                <a:spcPct val="105000"/>
+              </a:lnSpc>
+              <a:buNone/>
+            </a:pPr>
+            <a:r>
+              <a:rPr lang="en-US" sz="1150" dirty="0">
+                <a:solidFill>
+                  <a:srgbClr val="CCCCCC"/>
                 </a:solidFill>
                 <a:latin typeface="Courier New" pitchFamily="34" charset="0"/>
                 <a:ea typeface="Courier New" pitchFamily="34" charset="-122"/>
@@ -14488,7 +15079,7 @@
             <a:r>
               <a:rPr lang="en-US" sz="1150" dirty="0">
                 <a:solidFill>
-                  <a:srgbClr val="FF9F80"/>
+                  <a:srgbClr val="B5CEA8"/>
                 </a:solidFill>
                 <a:latin typeface="Courier New" pitchFamily="34" charset="0"/>
                 <a:ea typeface="Courier New" pitchFamily="34" charset="-122"/>
@@ -14505,7 +15096,7 @@
             <a:r>
               <a:rPr lang="en-US" sz="1150" dirty="0">
                 <a:solidFill>
-                  <a:srgbClr val="E8ECEF"/>
+                  <a:srgbClr val="CCCCCC"/>
                 </a:solidFill>
                 <a:latin typeface="Courier New" pitchFamily="34" charset="0"/>
                 <a:ea typeface="Courier New" pitchFamily="34" charset="-122"/>
@@ -14522,7 +15113,7 @@
             <a:r>
               <a:rPr lang="en-US" sz="1150" dirty="0">
                 <a:solidFill>
-                  <a:srgbClr val="FF9F80"/>
+                  <a:srgbClr val="B5CEA8"/>
                 </a:solidFill>
                 <a:latin typeface="Courier New" pitchFamily="34" charset="0"/>
                 <a:ea typeface="Courier New" pitchFamily="34" charset="-122"/>
@@ -14539,7 +15130,7 @@
             <a:r>
               <a:rPr lang="en-US" sz="1150" dirty="0">
                 <a:solidFill>
-                  <a:srgbClr val="E8ECEF"/>
+                  <a:srgbClr val="CCCCCC"/>
                 </a:solidFill>
                 <a:latin typeface="Courier New" pitchFamily="34" charset="0"/>
                 <a:ea typeface="Courier New" pitchFamily="34" charset="-122"/>
@@ -14559,7 +15150,24 @@
             <a:r>
               <a:rPr lang="en-US" sz="1150" dirty="0">
                 <a:solidFill>
-                  <a:srgbClr val="E8ECEF"/>
+                  <a:srgbClr val="6E7681"/>
+                </a:solidFill>
+                <a:latin typeface="Courier New" pitchFamily="34" charset="0"/>
+                <a:ea typeface="Courier New" pitchFamily="34" charset="-122"/>
+                <a:cs typeface="Courier New" pitchFamily="34" charset="-120"/>
+              </a:rPr>
+              <a:t>14  </a:t>
+            </a:r>
+            <a:pPr indent="0" marL="0">
+              <a:lnSpc>
+                <a:spcPct val="105000"/>
+              </a:lnSpc>
+              <a:buNone/>
+            </a:pPr>
+            <a:r>
+              <a:rPr lang="en-US" sz="1150" dirty="0">
+                <a:solidFill>
+                  <a:srgbClr val="CCCCCC"/>
                 </a:solidFill>
                 <a:latin typeface="Courier New" pitchFamily="34" charset="0"/>
                 <a:ea typeface="Courier New" pitchFamily="34" charset="-122"/>
@@ -14576,7 +15184,7 @@
             <a:r>
               <a:rPr lang="en-US" sz="1150" dirty="0">
                 <a:solidFill>
-                  <a:srgbClr val="E8ECEF"/>
+                  <a:srgbClr val="CCCCCC"/>
                 </a:solidFill>
                 <a:latin typeface="Courier New" pitchFamily="34" charset="0"/>
                 <a:ea typeface="Courier New" pitchFamily="34" charset="-122"/>
@@ -14593,24 +15201,58 @@
             <a:r>
               <a:rPr lang="en-US" sz="1150" dirty="0">
                 <a:solidFill>
-                  <a:srgbClr val="E8ECEF"/>
-                </a:solidFill>
-                <a:latin typeface="Courier New" pitchFamily="34" charset="0"/>
-                <a:ea typeface="Courier New" pitchFamily="34" charset="-122"/>
-                <a:cs typeface="Courier New" pitchFamily="34" charset="-120"/>
-              </a:rPr>
-              <a:t>      : </a:t>
-            </a:r>
-            <a:pPr indent="0" marL="0">
-              <a:lnSpc>
-                <a:spcPct val="105000"/>
-              </a:lnSpc>
-              <a:buNone/>
-            </a:pPr>
-            <a:r>
-              <a:rPr lang="en-US" sz="1150" dirty="0">
-                <a:solidFill>
-                  <a:srgbClr val="E8ECEF"/>
+                  <a:srgbClr val="CCCCCC"/>
+                </a:solidFill>
+                <a:latin typeface="Courier New" pitchFamily="34" charset="0"/>
+                <a:ea typeface="Courier New" pitchFamily="34" charset="-122"/>
+                <a:cs typeface="Courier New" pitchFamily="34" charset="-120"/>
+              </a:rPr>
+              <a:t>      </a:t>
+            </a:r>
+            <a:pPr indent="0" marL="0">
+              <a:lnSpc>
+                <a:spcPct val="105000"/>
+              </a:lnSpc>
+              <a:buNone/>
+            </a:pPr>
+            <a:r>
+              <a:rPr lang="en-US" sz="1150" dirty="0">
+                <a:solidFill>
+                  <a:srgbClr val="CCCCCC"/>
+                </a:solidFill>
+                <a:latin typeface="Courier New" pitchFamily="34" charset="0"/>
+                <a:ea typeface="Courier New" pitchFamily="34" charset="-122"/>
+                <a:cs typeface="Courier New" pitchFamily="34" charset="-120"/>
+              </a:rPr>
+              <a:t>:</a:t>
+            </a:r>
+            <a:pPr indent="0" marL="0">
+              <a:lnSpc>
+                <a:spcPct val="105000"/>
+              </a:lnSpc>
+              <a:buNone/>
+            </a:pPr>
+            <a:r>
+              <a:rPr lang="en-US" sz="1150" dirty="0">
+                <a:solidFill>
+                  <a:srgbClr val="CCCCCC"/>
+                </a:solidFill>
+                <a:latin typeface="Courier New" pitchFamily="34" charset="0"/>
+                <a:ea typeface="Courier New" pitchFamily="34" charset="-122"/>
+                <a:cs typeface="Courier New" pitchFamily="34" charset="-120"/>
+              </a:rPr>
+              <a:t> </a:t>
+            </a:r>
+            <a:pPr indent="0" marL="0">
+              <a:lnSpc>
+                <a:spcPct val="105000"/>
+              </a:lnSpc>
+              <a:buNone/>
+            </a:pPr>
+            <a:r>
+              <a:rPr lang="en-US" sz="1150" dirty="0">
+                <a:solidFill>
+                  <a:srgbClr val="4EC9B0"/>
                 </a:solidFill>
                 <a:latin typeface="Courier New" pitchFamily="34" charset="0"/>
                 <a:ea typeface="Courier New" pitchFamily="34" charset="-122"/>
@@ -14627,7 +15269,7 @@
             <a:r>
               <a:rPr lang="en-US" sz="1150" dirty="0">
                 <a:solidFill>
-                  <a:srgbClr val="E8ECEF"/>
+                  <a:srgbClr val="CCCCCC"/>
                 </a:solidFill>
                 <a:latin typeface="Courier New" pitchFamily="34" charset="0"/>
                 <a:ea typeface="Courier New" pitchFamily="34" charset="-122"/>
@@ -14647,7 +15289,24 @@
             <a:r>
               <a:rPr lang="en-US" sz="1150" dirty="0">
                 <a:solidFill>
-                  <a:srgbClr val="E8ECEF"/>
+                  <a:srgbClr val="6E7681"/>
+                </a:solidFill>
+                <a:latin typeface="Courier New" pitchFamily="34" charset="0"/>
+                <a:ea typeface="Courier New" pitchFamily="34" charset="-122"/>
+                <a:cs typeface="Courier New" pitchFamily="34" charset="-120"/>
+              </a:rPr>
+              <a:t>15  </a:t>
+            </a:r>
+            <a:pPr indent="0" marL="0">
+              <a:lnSpc>
+                <a:spcPct val="105000"/>
+              </a:lnSpc>
+              <a:buNone/>
+            </a:pPr>
+            <a:r>
+              <a:rPr lang="en-US" sz="1150" dirty="0">
+                <a:solidFill>
+                  <a:srgbClr val="CCCCCC"/>
                 </a:solidFill>
                 <a:latin typeface="Courier New" pitchFamily="34" charset="0"/>
                 <a:ea typeface="Courier New" pitchFamily="34" charset="-122"/>
@@ -14664,7 +15323,7 @@
             <a:r>
               <a:rPr lang="en-US" sz="1150" dirty="0">
                 <a:solidFill>
-                  <a:srgbClr val="E8ECEF"/>
+                  <a:srgbClr val="CCCCCC"/>
                 </a:solidFill>
                 <a:latin typeface="Courier New" pitchFamily="34" charset="0"/>
                 <a:ea typeface="Courier New" pitchFamily="34" charset="-122"/>
@@ -14681,24 +15340,58 @@
             <a:r>
               <a:rPr lang="en-US" sz="1150" dirty="0">
                 <a:solidFill>
-                  <a:srgbClr val="E8ECEF"/>
-                </a:solidFill>
-                <a:latin typeface="Courier New" pitchFamily="34" charset="0"/>
-                <a:ea typeface="Courier New" pitchFamily="34" charset="-122"/>
-                <a:cs typeface="Courier New" pitchFamily="34" charset="-120"/>
-              </a:rPr>
-              <a:t>            : </a:t>
-            </a:r>
-            <a:pPr indent="0" marL="0">
-              <a:lnSpc>
-                <a:spcPct val="105000"/>
-              </a:lnSpc>
-              <a:buNone/>
-            </a:pPr>
-            <a:r>
-              <a:rPr lang="en-US" sz="1150" dirty="0">
-                <a:solidFill>
-                  <a:srgbClr val="E8ECEF"/>
+                  <a:srgbClr val="CCCCCC"/>
+                </a:solidFill>
+                <a:latin typeface="Courier New" pitchFamily="34" charset="0"/>
+                <a:ea typeface="Courier New" pitchFamily="34" charset="-122"/>
+                <a:cs typeface="Courier New" pitchFamily="34" charset="-120"/>
+              </a:rPr>
+              <a:t>            </a:t>
+            </a:r>
+            <a:pPr indent="0" marL="0">
+              <a:lnSpc>
+                <a:spcPct val="105000"/>
+              </a:lnSpc>
+              <a:buNone/>
+            </a:pPr>
+            <a:r>
+              <a:rPr lang="en-US" sz="1150" dirty="0">
+                <a:solidFill>
+                  <a:srgbClr val="CCCCCC"/>
+                </a:solidFill>
+                <a:latin typeface="Courier New" pitchFamily="34" charset="0"/>
+                <a:ea typeface="Courier New" pitchFamily="34" charset="-122"/>
+                <a:cs typeface="Courier New" pitchFamily="34" charset="-120"/>
+              </a:rPr>
+              <a:t>:</a:t>
+            </a:r>
+            <a:pPr indent="0" marL="0">
+              <a:lnSpc>
+                <a:spcPct val="105000"/>
+              </a:lnSpc>
+              <a:buNone/>
+            </a:pPr>
+            <a:r>
+              <a:rPr lang="en-US" sz="1150" dirty="0">
+                <a:solidFill>
+                  <a:srgbClr val="CCCCCC"/>
+                </a:solidFill>
+                <a:latin typeface="Courier New" pitchFamily="34" charset="0"/>
+                <a:ea typeface="Courier New" pitchFamily="34" charset="-122"/>
+                <a:cs typeface="Courier New" pitchFamily="34" charset="-120"/>
+              </a:rPr>
+              <a:t> </a:t>
+            </a:r>
+            <a:pPr indent="0" marL="0">
+              <a:lnSpc>
+                <a:spcPct val="105000"/>
+              </a:lnSpc>
+              <a:buNone/>
+            </a:pPr>
+            <a:r>
+              <a:rPr lang="en-US" sz="1150" dirty="0">
+                <a:solidFill>
+                  <a:srgbClr val="4EC9B0"/>
                 </a:solidFill>
                 <a:latin typeface="Courier New" pitchFamily="34" charset="0"/>
                 <a:ea typeface="Courier New" pitchFamily="34" charset="-122"/>
@@ -14715,7 +15408,7 @@
             <a:r>
               <a:rPr lang="en-US" sz="1150" dirty="0">
                 <a:solidFill>
-                  <a:srgbClr val="E8ECEF"/>
+                  <a:srgbClr val="CCCCCC"/>
                 </a:solidFill>
                 <a:latin typeface="Courier New" pitchFamily="34" charset="0"/>
                 <a:ea typeface="Courier New" pitchFamily="34" charset="-122"/>
@@ -14735,7 +15428,24 @@
             <a:r>
               <a:rPr lang="en-US" sz="1150" dirty="0">
                 <a:solidFill>
-                  <a:srgbClr val="E8ECEF"/>
+                  <a:srgbClr val="6E7681"/>
+                </a:solidFill>
+                <a:latin typeface="Courier New" pitchFamily="34" charset="0"/>
+                <a:ea typeface="Courier New" pitchFamily="34" charset="-122"/>
+                <a:cs typeface="Courier New" pitchFamily="34" charset="-120"/>
+              </a:rPr>
+              <a:t>16  </a:t>
+            </a:r>
+            <a:pPr indent="0" marL="0">
+              <a:lnSpc>
+                <a:spcPct val="105000"/>
+              </a:lnSpc>
+              <a:buNone/>
+            </a:pPr>
+            <a:r>
+              <a:rPr lang="en-US" sz="1150" dirty="0">
+                <a:solidFill>
+                  <a:srgbClr val="CCCCCC"/>
                 </a:solidFill>
                 <a:latin typeface="Courier New" pitchFamily="34" charset="0"/>
                 <a:ea typeface="Courier New" pitchFamily="34" charset="-122"/>
@@ -14752,7 +15462,7 @@
             <a:r>
               <a:rPr lang="en-US" sz="1150" dirty="0">
                 <a:solidFill>
-                  <a:srgbClr val="E8ECEF"/>
+                  <a:srgbClr val="CCCCCC"/>
                 </a:solidFill>
                 <a:latin typeface="Courier New" pitchFamily="34" charset="0"/>
                 <a:ea typeface="Courier New" pitchFamily="34" charset="-122"/>
@@ -14769,24 +15479,58 @@
             <a:r>
               <a:rPr lang="en-US" sz="1150" dirty="0">
                 <a:solidFill>
-                  <a:srgbClr val="E8ECEF"/>
-                </a:solidFill>
-                <a:latin typeface="Courier New" pitchFamily="34" charset="0"/>
-                <a:ea typeface="Courier New" pitchFamily="34" charset="-122"/>
-                <a:cs typeface="Courier New" pitchFamily="34" charset="-120"/>
-              </a:rPr>
-              <a:t>       : </a:t>
-            </a:r>
-            <a:pPr indent="0" marL="0">
-              <a:lnSpc>
-                <a:spcPct val="105000"/>
-              </a:lnSpc>
-              <a:buNone/>
-            </a:pPr>
-            <a:r>
-              <a:rPr lang="en-US" sz="1150" dirty="0">
-                <a:solidFill>
-                  <a:srgbClr val="E8ECEF"/>
+                  <a:srgbClr val="CCCCCC"/>
+                </a:solidFill>
+                <a:latin typeface="Courier New" pitchFamily="34" charset="0"/>
+                <a:ea typeface="Courier New" pitchFamily="34" charset="-122"/>
+                <a:cs typeface="Courier New" pitchFamily="34" charset="-120"/>
+              </a:rPr>
+              <a:t>       </a:t>
+            </a:r>
+            <a:pPr indent="0" marL="0">
+              <a:lnSpc>
+                <a:spcPct val="105000"/>
+              </a:lnSpc>
+              <a:buNone/>
+            </a:pPr>
+            <a:r>
+              <a:rPr lang="en-US" sz="1150" dirty="0">
+                <a:solidFill>
+                  <a:srgbClr val="CCCCCC"/>
+                </a:solidFill>
+                <a:latin typeface="Courier New" pitchFamily="34" charset="0"/>
+                <a:ea typeface="Courier New" pitchFamily="34" charset="-122"/>
+                <a:cs typeface="Courier New" pitchFamily="34" charset="-120"/>
+              </a:rPr>
+              <a:t>:</a:t>
+            </a:r>
+            <a:pPr indent="0" marL="0">
+              <a:lnSpc>
+                <a:spcPct val="105000"/>
+              </a:lnSpc>
+              <a:buNone/>
+            </a:pPr>
+            <a:r>
+              <a:rPr lang="en-US" sz="1150" dirty="0">
+                <a:solidFill>
+                  <a:srgbClr val="CCCCCC"/>
+                </a:solidFill>
+                <a:latin typeface="Courier New" pitchFamily="34" charset="0"/>
+                <a:ea typeface="Courier New" pitchFamily="34" charset="-122"/>
+                <a:cs typeface="Courier New" pitchFamily="34" charset="-120"/>
+              </a:rPr>
+              <a:t> </a:t>
+            </a:r>
+            <a:pPr indent="0" marL="0">
+              <a:lnSpc>
+                <a:spcPct val="105000"/>
+              </a:lnSpc>
+              <a:buNone/>
+            </a:pPr>
+            <a:r>
+              <a:rPr lang="en-US" sz="1150" dirty="0">
+                <a:solidFill>
+                  <a:srgbClr val="4EC9B0"/>
                 </a:solidFill>
                 <a:latin typeface="Courier New" pitchFamily="34" charset="0"/>
                 <a:ea typeface="Courier New" pitchFamily="34" charset="-122"/>
@@ -14803,7 +15547,7 @@
             <a:r>
               <a:rPr lang="en-US" sz="1150" dirty="0">
                 <a:solidFill>
-                  <a:srgbClr val="E8ECEF"/>
+                  <a:srgbClr val="CCCCCC"/>
                 </a:solidFill>
                 <a:latin typeface="Courier New" pitchFamily="34" charset="0"/>
                 <a:ea typeface="Courier New" pitchFamily="34" charset="-122"/>
@@ -14823,7 +15567,24 @@
             <a:r>
               <a:rPr lang="en-US" sz="1150" dirty="0">
                 <a:solidFill>
-                  <a:srgbClr val="E8ECEF"/>
+                  <a:srgbClr val="6E7681"/>
+                </a:solidFill>
+                <a:latin typeface="Courier New" pitchFamily="34" charset="0"/>
+                <a:ea typeface="Courier New" pitchFamily="34" charset="-122"/>
+                <a:cs typeface="Courier New" pitchFamily="34" charset="-120"/>
+              </a:rPr>
+              <a:t>17  </a:t>
+            </a:r>
+            <a:pPr indent="0" marL="0">
+              <a:lnSpc>
+                <a:spcPct val="105000"/>
+              </a:lnSpc>
+              <a:buNone/>
+            </a:pPr>
+            <a:r>
+              <a:rPr lang="en-US" sz="1150" dirty="0">
+                <a:solidFill>
+                  <a:srgbClr val="CCCCCC"/>
                 </a:solidFill>
                 <a:latin typeface="Courier New" pitchFamily="34" charset="0"/>
                 <a:ea typeface="Courier New" pitchFamily="34" charset="-122"/>
@@ -14840,7 +15601,7 @@
             <a:r>
               <a:rPr lang="en-US" sz="1150" dirty="0">
                 <a:solidFill>
-                  <a:srgbClr val="E8ECEF"/>
+                  <a:srgbClr val="CCCCCC"/>
                 </a:solidFill>
                 <a:latin typeface="Courier New" pitchFamily="34" charset="0"/>
                 <a:ea typeface="Courier New" pitchFamily="34" charset="-122"/>
@@ -14857,24 +15618,58 @@
             <a:r>
               <a:rPr lang="en-US" sz="1150" dirty="0">
                 <a:solidFill>
-                  <a:srgbClr val="E8ECEF"/>
-                </a:solidFill>
-                <a:latin typeface="Courier New" pitchFamily="34" charset="0"/>
-                <a:ea typeface="Courier New" pitchFamily="34" charset="-122"/>
-                <a:cs typeface="Courier New" pitchFamily="34" charset="-120"/>
-              </a:rPr>
-              <a:t> : </a:t>
-            </a:r>
-            <a:pPr indent="0" marL="0">
-              <a:lnSpc>
-                <a:spcPct val="105000"/>
-              </a:lnSpc>
-              <a:buNone/>
-            </a:pPr>
-            <a:r>
-              <a:rPr lang="en-US" sz="1150" dirty="0">
-                <a:solidFill>
-                  <a:srgbClr val="E8ECEF"/>
+                  <a:srgbClr val="CCCCCC"/>
+                </a:solidFill>
+                <a:latin typeface="Courier New" pitchFamily="34" charset="0"/>
+                <a:ea typeface="Courier New" pitchFamily="34" charset="-122"/>
+                <a:cs typeface="Courier New" pitchFamily="34" charset="-120"/>
+              </a:rPr>
+              <a:t> </a:t>
+            </a:r>
+            <a:pPr indent="0" marL="0">
+              <a:lnSpc>
+                <a:spcPct val="105000"/>
+              </a:lnSpc>
+              <a:buNone/>
+            </a:pPr>
+            <a:r>
+              <a:rPr lang="en-US" sz="1150" dirty="0">
+                <a:solidFill>
+                  <a:srgbClr val="CCCCCC"/>
+                </a:solidFill>
+                <a:latin typeface="Courier New" pitchFamily="34" charset="0"/>
+                <a:ea typeface="Courier New" pitchFamily="34" charset="-122"/>
+                <a:cs typeface="Courier New" pitchFamily="34" charset="-120"/>
+              </a:rPr>
+              <a:t>:</a:t>
+            </a:r>
+            <a:pPr indent="0" marL="0">
+              <a:lnSpc>
+                <a:spcPct val="105000"/>
+              </a:lnSpc>
+              <a:buNone/>
+            </a:pPr>
+            <a:r>
+              <a:rPr lang="en-US" sz="1150" dirty="0">
+                <a:solidFill>
+                  <a:srgbClr val="CCCCCC"/>
+                </a:solidFill>
+                <a:latin typeface="Courier New" pitchFamily="34" charset="0"/>
+                <a:ea typeface="Courier New" pitchFamily="34" charset="-122"/>
+                <a:cs typeface="Courier New" pitchFamily="34" charset="-120"/>
+              </a:rPr>
+              <a:t> </a:t>
+            </a:r>
+            <a:pPr indent="0" marL="0">
+              <a:lnSpc>
+                <a:spcPct val="105000"/>
+              </a:lnSpc>
+              <a:buNone/>
+            </a:pPr>
+            <a:r>
+              <a:rPr lang="en-US" sz="1150" dirty="0">
+                <a:solidFill>
+                  <a:srgbClr val="4EC9B0"/>
                 </a:solidFill>
                 <a:latin typeface="Courier New" pitchFamily="34" charset="0"/>
                 <a:ea typeface="Courier New" pitchFamily="34" charset="-122"/>
@@ -14891,7 +15686,7 @@
             <a:r>
               <a:rPr lang="en-US" sz="1150" dirty="0">
                 <a:solidFill>
-                  <a:srgbClr val="E8ECEF"/>
+                  <a:srgbClr val="CCCCCC"/>
                 </a:solidFill>
                 <a:latin typeface="Courier New" pitchFamily="34" charset="0"/>
                 <a:ea typeface="Courier New" pitchFamily="34" charset="-122"/>
@@ -14911,7 +15706,24 @@
             <a:r>
               <a:rPr lang="en-US" sz="1150" dirty="0">
                 <a:solidFill>
-                  <a:srgbClr val="E8ECEF"/>
+                  <a:srgbClr val="6E7681"/>
+                </a:solidFill>
+                <a:latin typeface="Courier New" pitchFamily="34" charset="0"/>
+                <a:ea typeface="Courier New" pitchFamily="34" charset="-122"/>
+                <a:cs typeface="Courier New" pitchFamily="34" charset="-120"/>
+              </a:rPr>
+              <a:t>18  </a:t>
+            </a:r>
+            <a:pPr indent="0" marL="0">
+              <a:lnSpc>
+                <a:spcPct val="105000"/>
+              </a:lnSpc>
+              <a:buNone/>
+            </a:pPr>
+            <a:r>
+              <a:rPr lang="en-US" sz="1150" dirty="0">
+                <a:solidFill>
+                  <a:srgbClr val="CCCCCC"/>
                 </a:solidFill>
                 <a:latin typeface="Courier New" pitchFamily="34" charset="0"/>
                 <a:ea typeface="Courier New" pitchFamily="34" charset="-122"/>
@@ -14925,7 +15737,7 @@
       </p:sp>
       <p:sp>
         <p:nvSpPr>
-          <p:cNvPr id="9" name="Cartão"/>
+          <p:cNvPr id="13" name="Cartão"/>
           <p:cNvSpPr/>
           <p:nvPr/>
         </p:nvSpPr>
@@ -14954,7 +15766,7 @@
       </p:sp>
       <p:sp>
         <p:nvSpPr>
-          <p:cNvPr id="10" name="Ícone primary-key"/>
+          <p:cNvPr id="14" name="Ícone primary-key"/>
           <p:cNvSpPr/>
           <p:nvPr/>
         </p:nvSpPr>
@@ -14976,7 +15788,7 @@
       </p:sp>
       <p:pic>
         <p:nvPicPr>
-          <p:cNvPr id="11" name="Image 0" descr="primary-key">    </p:cNvPr>
+          <p:cNvPr id="15" name="Image 0" descr="primary-key">    </p:cNvPr>
           <p:cNvPicPr>
             <a:picLocks noChangeAspect="1"/>
           </p:cNvPicPr>
@@ -15000,7 +15812,7 @@
       </p:pic>
       <p:sp>
         <p:nvSpPr>
-          <p:cNvPr id="12" name="Text 8"/>
+          <p:cNvPr id="16" name="Text 12"/>
           <p:cNvSpPr txBox="1"/>
           <p:nvPr/>
         </p:nvSpPr>
@@ -15036,7 +15848,7 @@
       </p:sp>
       <p:sp>
         <p:nvSpPr>
-          <p:cNvPr id="13" name="Text 9"/>
+          <p:cNvPr id="17" name="Text 13"/>
           <p:cNvSpPr txBox="1"/>
           <p:nvPr/>
         </p:nvSpPr>
@@ -15072,7 +15884,7 @@
       </p:sp>
       <p:sp>
         <p:nvSpPr>
-          <p:cNvPr id="14" name="Cartão"/>
+          <p:cNvPr id="18" name="Cartão"/>
           <p:cNvSpPr/>
           <p:nvPr/>
         </p:nvSpPr>
@@ -15101,7 +15913,7 @@
       </p:sp>
       <p:sp>
         <p:nvSpPr>
-          <p:cNvPr id="15" name="Ícone number-sign"/>
+          <p:cNvPr id="19" name="Ícone number-sign"/>
           <p:cNvSpPr/>
           <p:nvPr/>
         </p:nvSpPr>
@@ -15123,7 +15935,7 @@
       </p:sp>
       <p:pic>
         <p:nvPicPr>
-          <p:cNvPr id="16" name="Image 1" descr="number-sign">    </p:cNvPr>
+          <p:cNvPr id="20" name="Image 1" descr="number-sign">    </p:cNvPr>
           <p:cNvPicPr>
             <a:picLocks noChangeAspect="1"/>
           </p:cNvPicPr>
@@ -15147,7 +15959,7 @@
       </p:pic>
       <p:sp>
         <p:nvSpPr>
-          <p:cNvPr id="17" name="Text 12"/>
+          <p:cNvPr id="21" name="Text 16"/>
           <p:cNvSpPr txBox="1"/>
           <p:nvPr/>
         </p:nvSpPr>
@@ -15183,7 +15995,7 @@
       </p:sp>
       <p:sp>
         <p:nvSpPr>
-          <p:cNvPr id="18" name="Text 13"/>
+          <p:cNvPr id="22" name="Text 17"/>
           <p:cNvSpPr txBox="1"/>
           <p:nvPr/>
         </p:nvSpPr>
@@ -15219,7 +16031,7 @@
       </p:sp>
       <p:sp>
         <p:nvSpPr>
-          <p:cNvPr id="19" name="Cartão"/>
+          <p:cNvPr id="23" name="Cartão"/>
           <p:cNvSpPr/>
           <p:nvPr/>
         </p:nvSpPr>
@@ -15248,7 +16060,7 @@
       </p:sp>
       <p:sp>
         <p:nvSpPr>
-          <p:cNvPr id="20" name="Ícone money-bills"/>
+          <p:cNvPr id="24" name="Ícone money-bills"/>
           <p:cNvSpPr/>
           <p:nvPr/>
         </p:nvSpPr>
@@ -15270,7 +16082,7 @@
       </p:sp>
       <p:pic>
         <p:nvPicPr>
-          <p:cNvPr id="21" name="Image 2" descr="money-bills">    </p:cNvPr>
+          <p:cNvPr id="25" name="Image 2" descr="money-bills">    </p:cNvPr>
           <p:cNvPicPr>
             <a:picLocks noChangeAspect="1"/>
           </p:cNvPicPr>
@@ -15294,7 +16106,7 @@
       </p:pic>
       <p:sp>
         <p:nvSpPr>
-          <p:cNvPr id="22" name="Text 16"/>
+          <p:cNvPr id="26" name="Text 20"/>
           <p:cNvSpPr txBox="1"/>
           <p:nvPr/>
         </p:nvSpPr>
@@ -15330,7 +16142,7 @@
       </p:sp>
       <p:sp>
         <p:nvSpPr>
-          <p:cNvPr id="23" name="Text 17"/>
+          <p:cNvPr id="27" name="Text 21"/>
           <p:cNvSpPr txBox="1"/>
           <p:nvPr/>
         </p:nvSpPr>
@@ -15366,7 +16178,7 @@
       </p:sp>
       <p:sp>
         <p:nvSpPr>
-          <p:cNvPr id="24" name="Cartão"/>
+          <p:cNvPr id="28" name="Cartão"/>
           <p:cNvSpPr/>
           <p:nvPr/>
         </p:nvSpPr>
@@ -15395,7 +16207,7 @@
       </p:sp>
       <p:sp>
         <p:nvSpPr>
-          <p:cNvPr id="25" name="Ícone history"/>
+          <p:cNvPr id="29" name="Ícone history"/>
           <p:cNvSpPr/>
           <p:nvPr/>
         </p:nvSpPr>
@@ -15417,7 +16229,7 @@
       </p:sp>
       <p:pic>
         <p:nvPicPr>
-          <p:cNvPr id="26" name="Image 3" descr="history">    </p:cNvPr>
+          <p:cNvPr id="30" name="Image 3" descr="history">    </p:cNvPr>
           <p:cNvPicPr>
             <a:picLocks noChangeAspect="1"/>
           </p:cNvPicPr>
@@ -15441,7 +16253,7 @@
       </p:pic>
       <p:sp>
         <p:nvSpPr>
-          <p:cNvPr id="27" name="Text 20"/>
+          <p:cNvPr id="31" name="Text 24"/>
           <p:cNvSpPr txBox="1"/>
           <p:nvPr/>
         </p:nvSpPr>
@@ -15477,7 +16289,7 @@
       </p:sp>
       <p:sp>
         <p:nvSpPr>
-          <p:cNvPr id="28" name="Text 21"/>
+          <p:cNvPr id="32" name="Text 25"/>
           <p:cNvSpPr txBox="1"/>
           <p:nvPr/>
         </p:nvSpPr>
@@ -16687,24 +17499,29 @@
       </p:sp>
       <p:sp>
         <p:nvSpPr>
-          <p:cNvPr id="5" name="Código"/>
+          <p:cNvPr id="5" name="Editor"/>
           <p:cNvSpPr/>
           <p:nvPr/>
         </p:nvSpPr>
         <p:spPr>
           <a:xfrm>
             <a:off x="548640" y="1645920"/>
-            <a:ext cx="4937760" cy="2331720"/>
+            <a:ext cx="4937760" cy="2423160"/>
           </a:xfrm>
           <a:prstGeom prst="roundRect">
             <a:avLst>
-              <a:gd name="adj" fmla="val 3922"/>
+              <a:gd name="adj" fmla="val 3774"/>
             </a:avLst>
           </a:prstGeom>
           <a:solidFill>
-            <a:srgbClr val="12171C"/>
+            <a:srgbClr val="181818"/>
           </a:solidFill>
-          <a:ln/>
+          <a:ln w="9525">
+            <a:solidFill>
+              <a:srgbClr val="2B2B2B"/>
+            </a:solidFill>
+            <a:prstDash val="solid"/>
+          </a:ln>
           <a:effectLst>
             <a:outerShdw sx="100000" sy="100000" kx="0" ky="0" algn="bl" rotWithShape="0" blurRad="101600" dist="25400" dir="5400000">
               <a:srgbClr val="223548">
@@ -16716,42 +17533,25 @@
       </p:sp>
       <p:sp>
         <p:nvSpPr>
-          <p:cNvPr id="6" name="Text 3"/>
-          <p:cNvSpPr txBox="1"/>
-          <p:nvPr/>
-        </p:nvSpPr>
-        <p:spPr>
-          <a:xfrm>
-            <a:off x="777240" y="1755648"/>
-            <a:ext cx="4480560" cy="256032"/>
-          </a:xfrm>
-          <a:prstGeom prst="rect">
-            <a:avLst/>
-          </a:prstGeom>
-          <a:noFill/>
-          <a:ln/>
-        </p:spPr>
-        <p:txBody>
-          <a:bodyPr wrap="square" lIns="0" tIns="0" rIns="0" bIns="0" rtlCol="0" anchor="ctr"/>
-          <a:lstStyle/>
-          <a:p>
-            <a:pPr indent="0" marL="0">
-              <a:buNone/>
-            </a:pPr>
-            <a:r>
-              <a:rPr lang="en-US" sz="1000" dirty="0">
-                <a:solidFill>
-                  <a:srgbClr val="A9B4BE"/>
-                </a:solidFill>
-                <a:latin typeface="Courier New" pitchFamily="34" charset="0"/>
-                <a:ea typeface="Courier New" pitchFamily="34" charset="-122"/>
-                <a:cs typeface="Courier New" pitchFamily="34" charset="-120"/>
-              </a:rPr>
-              <a:t>ZAVBS_PC_COMMON/Dictionary/ZTA_PC_CODELIST.abap</a:t>
-            </a:r>
-            <a:endParaRPr lang="en-US" sz="1000" dirty="0"/>
-          </a:p>
-        </p:txBody>
+          <p:cNvPr id="6" name="Área do editor"/>
+          <p:cNvSpPr/>
+          <p:nvPr/>
+        </p:nvSpPr>
+        <p:spPr>
+          <a:xfrm>
+            <a:off x="548640" y="1993392"/>
+            <a:ext cx="4937760" cy="2075688"/>
+          </a:xfrm>
+          <a:prstGeom prst="roundRect">
+            <a:avLst>
+              <a:gd name="adj" fmla="val 4405"/>
+            </a:avLst>
+          </a:prstGeom>
+          <a:solidFill>
+            <a:srgbClr val="1F1F1F"/>
+          </a:solidFill>
+          <a:ln/>
+        </p:spPr>
       </p:sp>
       <p:sp>
         <p:nvSpPr>
@@ -16761,16 +17561,36 @@
         </p:nvSpPr>
         <p:spPr>
           <a:xfrm>
-            <a:off x="777240" y="2066544"/>
-            <a:ext cx="4480560" cy="0"/>
+            <a:off x="557784" y="1993392"/>
+            <a:ext cx="4919472" cy="137160"/>
+          </a:xfrm>
+          <a:prstGeom prst="rect">
+            <a:avLst/>
+          </a:prstGeom>
+          <a:solidFill>
+            <a:srgbClr val="1F1F1F"/>
+          </a:solidFill>
+          <a:ln/>
+        </p:spPr>
+      </p:sp>
+      <p:sp>
+        <p:nvSpPr>
+          <p:cNvPr id="8" name="Shape 5"/>
+          <p:cNvSpPr/>
+          <p:nvPr/>
+        </p:nvSpPr>
+        <p:spPr>
+          <a:xfrm>
+            <a:off x="557784" y="1993392"/>
+            <a:ext cx="4919472" cy="0"/>
           </a:xfrm>
           <a:prstGeom prst="line">
             <a:avLst/>
           </a:prstGeom>
           <a:noFill/>
-          <a:ln w="12700">
+          <a:ln w="9525">
             <a:solidFill>
-              <a:srgbClr val="2E3A46"/>
+              <a:srgbClr val="2B2B2B"/>
             </a:solidFill>
             <a:prstDash val="solid"/>
           </a:ln>
@@ -16778,14 +17598,75 @@
       </p:sp>
       <p:sp>
         <p:nvSpPr>
-          <p:cNvPr id="8" name="Trecho de código"/>
+          <p:cNvPr id="9" name="Aba ZTA_PC_CODELIST.abap"/>
+          <p:cNvSpPr/>
+          <p:nvPr/>
+        </p:nvSpPr>
+        <p:spPr>
+          <a:xfrm>
+            <a:off x="640080" y="1719072"/>
+            <a:ext cx="1874520" cy="274320"/>
+          </a:xfrm>
+          <a:prstGeom prst="rect">
+            <a:avLst/>
+          </a:prstGeom>
+          <a:solidFill>
+            <a:srgbClr val="1F1F1F"/>
+          </a:solidFill>
+          <a:ln/>
+        </p:spPr>
+        <p:txBody>
+          <a:bodyPr wrap="square" lIns="0" tIns="0" rIns="0" bIns="0" rtlCol="0" anchor="ctr"/>
+          <a:lstStyle/>
+          <a:p>
+            <a:pPr algn="ctr" indent="0" marL="0">
+              <a:buNone/>
+            </a:pPr>
+            <a:r>
+              <a:rPr lang="en-US" sz="1000" dirty="0">
+                <a:solidFill>
+                  <a:srgbClr val="FFFFFF"/>
+                </a:solidFill>
+              </a:rPr>
+              <a:t>ZTA_PC_CODELIST.abap</a:t>
+            </a:r>
+            <a:endParaRPr lang="en-US" sz="1000" dirty="0"/>
+          </a:p>
+        </p:txBody>
+      </p:sp>
+      <p:sp>
+        <p:nvSpPr>
+          <p:cNvPr id="10" name="Shape 7"/>
+          <p:cNvSpPr/>
+          <p:nvPr/>
+        </p:nvSpPr>
+        <p:spPr>
+          <a:xfrm>
+            <a:off x="640080" y="1719072"/>
+            <a:ext cx="1874520" cy="0"/>
+          </a:xfrm>
+          <a:prstGeom prst="line">
+            <a:avLst/>
+          </a:prstGeom>
+          <a:noFill/>
+          <a:ln w="19050">
+            <a:solidFill>
+              <a:srgbClr val="0078D4"/>
+            </a:solidFill>
+            <a:prstDash val="solid"/>
+          </a:ln>
+        </p:spPr>
+      </p:sp>
+      <p:sp>
+        <p:nvSpPr>
+          <p:cNvPr id="11" name="Breadcrumb"/>
           <p:cNvSpPr txBox="1"/>
           <p:nvPr/>
         </p:nvSpPr>
         <p:spPr>
           <a:xfrm>
-            <a:off x="777240" y="2157984"/>
-            <a:ext cx="4480560" cy="1709928"/>
+            <a:off x="777240" y="2103120"/>
+            <a:ext cx="4480560" cy="219456"/>
           </a:xfrm>
           <a:prstGeom prst="rect">
             <a:avLst/>
@@ -16794,6 +17675,86 @@
           <a:ln/>
         </p:spPr>
         <p:txBody>
+          <a:bodyPr wrap="square" lIns="0" tIns="0" rIns="0" bIns="0" rtlCol="0" anchor="ctr"/>
+          <a:lstStyle/>
+          <a:p>
+            <a:pPr indent="0" marL="0">
+              <a:buNone/>
+            </a:pPr>
+            <a:r>
+              <a:rPr lang="en-US" sz="900" dirty="0">
+                <a:solidFill>
+                  <a:srgbClr val="A9A9A9"/>
+                </a:solidFill>
+              </a:rPr>
+              <a:t>ZAVBS_PC_COMMON</a:t>
+            </a:r>
+            <a:pPr indent="0" marL="0">
+              <a:buNone/>
+            </a:pPr>
+            <a:r>
+              <a:rPr lang="en-US" sz="900" dirty="0">
+                <a:solidFill>
+                  <a:srgbClr val="6E7681"/>
+                </a:solidFill>
+              </a:rPr>
+              <a:t>  ›  </a:t>
+            </a:r>
+            <a:pPr indent="0" marL="0">
+              <a:buNone/>
+            </a:pPr>
+            <a:r>
+              <a:rPr lang="en-US" sz="900" dirty="0">
+                <a:solidFill>
+                  <a:srgbClr val="A9A9A9"/>
+                </a:solidFill>
+              </a:rPr>
+              <a:t>Dictionary</a:t>
+            </a:r>
+            <a:pPr indent="0" marL="0">
+              <a:buNone/>
+            </a:pPr>
+            <a:r>
+              <a:rPr lang="en-US" sz="900" dirty="0">
+                <a:solidFill>
+                  <a:srgbClr val="6E7681"/>
+                </a:solidFill>
+              </a:rPr>
+              <a:t>  ›  </a:t>
+            </a:r>
+            <a:pPr indent="0" marL="0">
+              <a:buNone/>
+            </a:pPr>
+            <a:r>
+              <a:rPr lang="en-US" sz="900" dirty="0">
+                <a:solidFill>
+                  <a:srgbClr val="A9A9A9"/>
+                </a:solidFill>
+              </a:rPr>
+              <a:t>ZTA_PC_CODELIST.abap</a:t>
+            </a:r>
+            <a:endParaRPr lang="en-US" sz="900" dirty="0"/>
+          </a:p>
+        </p:txBody>
+      </p:sp>
+      <p:sp>
+        <p:nvSpPr>
+          <p:cNvPr id="12" name="Trecho de código"/>
+          <p:cNvSpPr txBox="1"/>
+          <p:nvPr/>
+        </p:nvSpPr>
+        <p:spPr>
+          <a:xfrm>
+            <a:off x="731520" y="2414016"/>
+            <a:ext cx="4617720" cy="1563624"/>
+          </a:xfrm>
+          <a:prstGeom prst="rect">
+            <a:avLst/>
+          </a:prstGeom>
+          <a:noFill/>
+          <a:ln/>
+        </p:spPr>
+        <p:txBody>
           <a:bodyPr wrap="square" lIns="0" tIns="0" rIns="0" bIns="0" rtlCol="0" anchor="t"/>
           <a:lstStyle/>
           <a:p>
@@ -16806,7 +17767,24 @@
             <a:r>
               <a:rPr lang="en-US" sz="1150" dirty="0">
                 <a:solidFill>
-                  <a:srgbClr val="4DB1FF"/>
+                  <a:srgbClr val="6E7681"/>
+                </a:solidFill>
+                <a:latin typeface="Courier New" pitchFamily="34" charset="0"/>
+                <a:ea typeface="Courier New" pitchFamily="34" charset="-122"/>
+                <a:cs typeface="Courier New" pitchFamily="34" charset="-120"/>
+              </a:rPr>
+              <a:t> 1  </a:t>
+            </a:r>
+            <a:pPr indent="0" marL="0">
+              <a:lnSpc>
+                <a:spcPct val="105000"/>
+              </a:lnSpc>
+              <a:buNone/>
+            </a:pPr>
+            <a:r>
+              <a:rPr lang="en-US" sz="1150" dirty="0">
+                <a:solidFill>
+                  <a:srgbClr val="569CD6"/>
                 </a:solidFill>
                 <a:latin typeface="Courier New" pitchFamily="34" charset="0"/>
                 <a:ea typeface="Courier New" pitchFamily="34" charset="-122"/>
@@ -16823,7 +17801,7 @@
             <a:r>
               <a:rPr lang="en-US" sz="1150" dirty="0">
                 <a:solidFill>
-                  <a:srgbClr val="E8ECEF"/>
+                  <a:srgbClr val="CCCCCC"/>
                 </a:solidFill>
                 <a:latin typeface="Courier New" pitchFamily="34" charset="0"/>
                 <a:ea typeface="Courier New" pitchFamily="34" charset="-122"/>
@@ -16840,7 +17818,7 @@
             <a:r>
               <a:rPr lang="en-US" sz="1150" dirty="0">
                 <a:solidFill>
-                  <a:srgbClr val="4DB1FF"/>
+                  <a:srgbClr val="569CD6"/>
                 </a:solidFill>
                 <a:latin typeface="Courier New" pitchFamily="34" charset="0"/>
                 <a:ea typeface="Courier New" pitchFamily="34" charset="-122"/>
@@ -16857,7 +17835,7 @@
             <a:r>
               <a:rPr lang="en-US" sz="1150" dirty="0">
                 <a:solidFill>
-                  <a:srgbClr val="E8ECEF"/>
+                  <a:srgbClr val="CCCCCC"/>
                 </a:solidFill>
                 <a:latin typeface="Courier New" pitchFamily="34" charset="0"/>
                 <a:ea typeface="Courier New" pitchFamily="34" charset="-122"/>
@@ -16874,7 +17852,7 @@
             <a:r>
               <a:rPr lang="en-US" sz="1150" dirty="0">
                 <a:solidFill>
-                  <a:srgbClr val="E8ECEF"/>
+                  <a:srgbClr val="4EC9B0"/>
                 </a:solidFill>
                 <a:latin typeface="Courier New" pitchFamily="34" charset="0"/>
                 <a:ea typeface="Courier New" pitchFamily="34" charset="-122"/>
@@ -16891,13 +17869,30 @@
             <a:r>
               <a:rPr lang="en-US" sz="1150" dirty="0">
                 <a:solidFill>
-                  <a:srgbClr val="E8ECEF"/>
-                </a:solidFill>
-                <a:latin typeface="Courier New" pitchFamily="34" charset="0"/>
-                <a:ea typeface="Courier New" pitchFamily="34" charset="-122"/>
-                <a:cs typeface="Courier New" pitchFamily="34" charset="-120"/>
-              </a:rPr>
-              <a:t> {</a:t>
+                  <a:srgbClr val="CCCCCC"/>
+                </a:solidFill>
+                <a:latin typeface="Courier New" pitchFamily="34" charset="0"/>
+                <a:ea typeface="Courier New" pitchFamily="34" charset="-122"/>
+                <a:cs typeface="Courier New" pitchFamily="34" charset="-120"/>
+              </a:rPr>
+              <a:t> </a:t>
+            </a:r>
+            <a:pPr indent="0" marL="0">
+              <a:lnSpc>
+                <a:spcPct val="105000"/>
+              </a:lnSpc>
+              <a:buNone/>
+            </a:pPr>
+            <a:r>
+              <a:rPr lang="en-US" sz="1150" dirty="0">
+                <a:solidFill>
+                  <a:srgbClr val="CCCCCC"/>
+                </a:solidFill>
+                <a:latin typeface="Courier New" pitchFamily="34" charset="0"/>
+                <a:ea typeface="Courier New" pitchFamily="34" charset="-122"/>
+                <a:cs typeface="Courier New" pitchFamily="34" charset="-120"/>
+              </a:rPr>
+              <a:t>{</a:t>
             </a:r>
             <a:endParaRPr lang="en-US" sz="1150" dirty="0"/>
           </a:p>
@@ -16911,7 +17906,24 @@
             <a:r>
               <a:rPr lang="en-US" sz="1150" dirty="0">
                 <a:solidFill>
-                  <a:srgbClr val="E8ECEF"/>
+                  <a:srgbClr val="6E7681"/>
+                </a:solidFill>
+                <a:latin typeface="Courier New" pitchFamily="34" charset="0"/>
+                <a:ea typeface="Courier New" pitchFamily="34" charset="-122"/>
+                <a:cs typeface="Courier New" pitchFamily="34" charset="-120"/>
+              </a:rPr>
+              <a:t> 2  </a:t>
+            </a:r>
+            <a:pPr indent="0" marL="0">
+              <a:lnSpc>
+                <a:spcPct val="105000"/>
+              </a:lnSpc>
+              <a:buNone/>
+            </a:pPr>
+            <a:r>
+              <a:rPr lang="en-US" sz="1150" dirty="0">
+                <a:solidFill>
+                  <a:srgbClr val="CCCCCC"/>
                 </a:solidFill>
                 <a:latin typeface="Courier New" pitchFamily="34" charset="0"/>
                 <a:ea typeface="Courier New" pitchFamily="34" charset="-122"/>
@@ -16928,7 +17940,7 @@
             <a:r>
               <a:rPr lang="en-US" sz="1150" dirty="0">
                 <a:solidFill>
-                  <a:srgbClr val="4DB1FF"/>
+                  <a:srgbClr val="569CD6"/>
                 </a:solidFill>
                 <a:latin typeface="Courier New" pitchFamily="34" charset="0"/>
                 <a:ea typeface="Courier New" pitchFamily="34" charset="-122"/>
@@ -16945,7 +17957,7 @@
             <a:r>
               <a:rPr lang="en-US" sz="1150" dirty="0">
                 <a:solidFill>
-                  <a:srgbClr val="E8ECEF"/>
+                  <a:srgbClr val="CCCCCC"/>
                 </a:solidFill>
                 <a:latin typeface="Courier New" pitchFamily="34" charset="0"/>
                 <a:ea typeface="Courier New" pitchFamily="34" charset="-122"/>
@@ -16962,7 +17974,7 @@
             <a:r>
               <a:rPr lang="en-US" sz="1150" dirty="0">
                 <a:solidFill>
-                  <a:srgbClr val="E8ECEF"/>
+                  <a:srgbClr val="CCCCCC"/>
                 </a:solidFill>
                 <a:latin typeface="Courier New" pitchFamily="34" charset="0"/>
                 <a:ea typeface="Courier New" pitchFamily="34" charset="-122"/>
@@ -16979,75 +17991,41 @@
             <a:r>
               <a:rPr lang="en-US" sz="1150" dirty="0">
                 <a:solidFill>
-                  <a:srgbClr val="E8ECEF"/>
-                </a:solidFill>
-                <a:latin typeface="Courier New" pitchFamily="34" charset="0"/>
-                <a:ea typeface="Courier New" pitchFamily="34" charset="-122"/>
-                <a:cs typeface="Courier New" pitchFamily="34" charset="-120"/>
-              </a:rPr>
-              <a:t>  : </a:t>
-            </a:r>
-            <a:pPr indent="0" marL="0">
-              <a:lnSpc>
-                <a:spcPct val="105000"/>
-              </a:lnSpc>
-              <a:buNone/>
-            </a:pPr>
-            <a:r>
-              <a:rPr lang="en-US" sz="1150" dirty="0">
-                <a:solidFill>
-                  <a:srgbClr val="E8ECEF"/>
-                </a:solidFill>
-                <a:latin typeface="Courier New" pitchFamily="34" charset="0"/>
-                <a:ea typeface="Courier New" pitchFamily="34" charset="-122"/>
-                <a:cs typeface="Courier New" pitchFamily="34" charset="-120"/>
-              </a:rPr>
-              <a:t>abap</a:t>
-            </a:r>
-            <a:pPr indent="0" marL="0">
-              <a:lnSpc>
-                <a:spcPct val="105000"/>
-              </a:lnSpc>
-              <a:buNone/>
-            </a:pPr>
-            <a:r>
-              <a:rPr lang="en-US" sz="1150" dirty="0">
-                <a:solidFill>
-                  <a:srgbClr val="E8ECEF"/>
-                </a:solidFill>
-                <a:latin typeface="Courier New" pitchFamily="34" charset="0"/>
-                <a:ea typeface="Courier New" pitchFamily="34" charset="-122"/>
-                <a:cs typeface="Courier New" pitchFamily="34" charset="-120"/>
-              </a:rPr>
-              <a:t>.</a:t>
-            </a:r>
-            <a:pPr indent="0" marL="0">
-              <a:lnSpc>
-                <a:spcPct val="105000"/>
-              </a:lnSpc>
-              <a:buNone/>
-            </a:pPr>
-            <a:r>
-              <a:rPr lang="en-US" sz="1150" dirty="0">
-                <a:solidFill>
-                  <a:srgbClr val="E8ECEF"/>
-                </a:solidFill>
-                <a:latin typeface="Courier New" pitchFamily="34" charset="0"/>
-                <a:ea typeface="Courier New" pitchFamily="34" charset="-122"/>
-                <a:cs typeface="Courier New" pitchFamily="34" charset="-120"/>
-              </a:rPr>
-              <a:t>clnt</a:t>
-            </a:r>
-            <a:pPr indent="0" marL="0">
-              <a:lnSpc>
-                <a:spcPct val="105000"/>
-              </a:lnSpc>
-              <a:buNone/>
-            </a:pPr>
-            <a:r>
-              <a:rPr lang="en-US" sz="1150" dirty="0">
-                <a:solidFill>
-                  <a:srgbClr val="E8ECEF"/>
+                  <a:srgbClr val="CCCCCC"/>
+                </a:solidFill>
+                <a:latin typeface="Courier New" pitchFamily="34" charset="0"/>
+                <a:ea typeface="Courier New" pitchFamily="34" charset="-122"/>
+                <a:cs typeface="Courier New" pitchFamily="34" charset="-120"/>
+              </a:rPr>
+              <a:t>  </a:t>
+            </a:r>
+            <a:pPr indent="0" marL="0">
+              <a:lnSpc>
+                <a:spcPct val="105000"/>
+              </a:lnSpc>
+              <a:buNone/>
+            </a:pPr>
+            <a:r>
+              <a:rPr lang="en-US" sz="1150" dirty="0">
+                <a:solidFill>
+                  <a:srgbClr val="CCCCCC"/>
+                </a:solidFill>
+                <a:latin typeface="Courier New" pitchFamily="34" charset="0"/>
+                <a:ea typeface="Courier New" pitchFamily="34" charset="-122"/>
+                <a:cs typeface="Courier New" pitchFamily="34" charset="-120"/>
+              </a:rPr>
+              <a:t>:</a:t>
+            </a:r>
+            <a:pPr indent="0" marL="0">
+              <a:lnSpc>
+                <a:spcPct val="105000"/>
+              </a:lnSpc>
+              <a:buNone/>
+            </a:pPr>
+            <a:r>
+              <a:rPr lang="en-US" sz="1150" dirty="0">
+                <a:solidFill>
+                  <a:srgbClr val="CCCCCC"/>
                 </a:solidFill>
                 <a:latin typeface="Courier New" pitchFamily="34" charset="0"/>
                 <a:ea typeface="Courier New" pitchFamily="34" charset="-122"/>
@@ -17064,7 +18042,41 @@
             <a:r>
               <a:rPr lang="en-US" sz="1150" dirty="0">
                 <a:solidFill>
-                  <a:srgbClr val="4DB1FF"/>
+                  <a:srgbClr val="4EC9B0"/>
+                </a:solidFill>
+                <a:latin typeface="Courier New" pitchFamily="34" charset="0"/>
+                <a:ea typeface="Courier New" pitchFamily="34" charset="-122"/>
+                <a:cs typeface="Courier New" pitchFamily="34" charset="-120"/>
+              </a:rPr>
+              <a:t>abap.clnt</a:t>
+            </a:r>
+            <a:pPr indent="0" marL="0">
+              <a:lnSpc>
+                <a:spcPct val="105000"/>
+              </a:lnSpc>
+              <a:buNone/>
+            </a:pPr>
+            <a:r>
+              <a:rPr lang="en-US" sz="1150" dirty="0">
+                <a:solidFill>
+                  <a:srgbClr val="CCCCCC"/>
+                </a:solidFill>
+                <a:latin typeface="Courier New" pitchFamily="34" charset="0"/>
+                <a:ea typeface="Courier New" pitchFamily="34" charset="-122"/>
+                <a:cs typeface="Courier New" pitchFamily="34" charset="-120"/>
+              </a:rPr>
+              <a:t> </a:t>
+            </a:r>
+            <a:pPr indent="0" marL="0">
+              <a:lnSpc>
+                <a:spcPct val="105000"/>
+              </a:lnSpc>
+              <a:buNone/>
+            </a:pPr>
+            <a:r>
+              <a:rPr lang="en-US" sz="1150" dirty="0">
+                <a:solidFill>
+                  <a:srgbClr val="569CD6"/>
                 </a:solidFill>
                 <a:latin typeface="Courier New" pitchFamily="34" charset="0"/>
                 <a:ea typeface="Courier New" pitchFamily="34" charset="-122"/>
@@ -17081,7 +18093,7 @@
             <a:r>
               <a:rPr lang="en-US" sz="1150" dirty="0">
                 <a:solidFill>
-                  <a:srgbClr val="E8ECEF"/>
+                  <a:srgbClr val="CCCCCC"/>
                 </a:solidFill>
                 <a:latin typeface="Courier New" pitchFamily="34" charset="0"/>
                 <a:ea typeface="Courier New" pitchFamily="34" charset="-122"/>
@@ -17098,7 +18110,7 @@
             <a:r>
               <a:rPr lang="en-US" sz="1150" dirty="0">
                 <a:solidFill>
-                  <a:srgbClr val="4DB1FF"/>
+                  <a:srgbClr val="569CD6"/>
                 </a:solidFill>
                 <a:latin typeface="Courier New" pitchFamily="34" charset="0"/>
                 <a:ea typeface="Courier New" pitchFamily="34" charset="-122"/>
@@ -17115,7 +18127,7 @@
             <a:r>
               <a:rPr lang="en-US" sz="1150" dirty="0">
                 <a:solidFill>
-                  <a:srgbClr val="E8ECEF"/>
+                  <a:srgbClr val="CCCCCC"/>
                 </a:solidFill>
                 <a:latin typeface="Courier New" pitchFamily="34" charset="0"/>
                 <a:ea typeface="Courier New" pitchFamily="34" charset="-122"/>
@@ -17135,7 +18147,24 @@
             <a:r>
               <a:rPr lang="en-US" sz="1150" dirty="0">
                 <a:solidFill>
-                  <a:srgbClr val="E8ECEF"/>
+                  <a:srgbClr val="6E7681"/>
+                </a:solidFill>
+                <a:latin typeface="Courier New" pitchFamily="34" charset="0"/>
+                <a:ea typeface="Courier New" pitchFamily="34" charset="-122"/>
+                <a:cs typeface="Courier New" pitchFamily="34" charset="-120"/>
+              </a:rPr>
+              <a:t> 3  </a:t>
+            </a:r>
+            <a:pPr indent="0" marL="0">
+              <a:lnSpc>
+                <a:spcPct val="105000"/>
+              </a:lnSpc>
+              <a:buNone/>
+            </a:pPr>
+            <a:r>
+              <a:rPr lang="en-US" sz="1150" dirty="0">
+                <a:solidFill>
+                  <a:srgbClr val="CCCCCC"/>
                 </a:solidFill>
                 <a:latin typeface="Courier New" pitchFamily="34" charset="0"/>
                 <a:ea typeface="Courier New" pitchFamily="34" charset="-122"/>
@@ -17152,7 +18181,7 @@
             <a:r>
               <a:rPr lang="en-US" sz="1150" dirty="0">
                 <a:solidFill>
-                  <a:srgbClr val="4DB1FF"/>
+                  <a:srgbClr val="569CD6"/>
                 </a:solidFill>
                 <a:latin typeface="Courier New" pitchFamily="34" charset="0"/>
                 <a:ea typeface="Courier New" pitchFamily="34" charset="-122"/>
@@ -17169,7 +18198,7 @@
             <a:r>
               <a:rPr lang="en-US" sz="1150" dirty="0">
                 <a:solidFill>
-                  <a:srgbClr val="E8ECEF"/>
+                  <a:srgbClr val="CCCCCC"/>
                 </a:solidFill>
                 <a:latin typeface="Courier New" pitchFamily="34" charset="0"/>
                 <a:ea typeface="Courier New" pitchFamily="34" charset="-122"/>
@@ -17186,7 +18215,7 @@
             <a:r>
               <a:rPr lang="en-US" sz="1150" dirty="0">
                 <a:solidFill>
-                  <a:srgbClr val="E8ECEF"/>
+                  <a:srgbClr val="CCCCCC"/>
                 </a:solidFill>
                 <a:latin typeface="Courier New" pitchFamily="34" charset="0"/>
                 <a:ea typeface="Courier New" pitchFamily="34" charset="-122"/>
@@ -17203,75 +18232,75 @@
             <a:r>
               <a:rPr lang="en-US" sz="1150" dirty="0">
                 <a:solidFill>
-                  <a:srgbClr val="E8ECEF"/>
-                </a:solidFill>
-                <a:latin typeface="Courier New" pitchFamily="34" charset="0"/>
-                <a:ea typeface="Courier New" pitchFamily="34" charset="-122"/>
-                <a:cs typeface="Courier New" pitchFamily="34" charset="-120"/>
-              </a:rPr>
-              <a:t>   : </a:t>
-            </a:r>
-            <a:pPr indent="0" marL="0">
-              <a:lnSpc>
-                <a:spcPct val="105000"/>
-              </a:lnSpc>
-              <a:buNone/>
-            </a:pPr>
-            <a:r>
-              <a:rPr lang="en-US" sz="1150" dirty="0">
-                <a:solidFill>
-                  <a:srgbClr val="E8ECEF"/>
-                </a:solidFill>
-                <a:latin typeface="Courier New" pitchFamily="34" charset="0"/>
-                <a:ea typeface="Courier New" pitchFamily="34" charset="-122"/>
-                <a:cs typeface="Courier New" pitchFamily="34" charset="-120"/>
-              </a:rPr>
-              <a:t>abap</a:t>
-            </a:r>
-            <a:pPr indent="0" marL="0">
-              <a:lnSpc>
-                <a:spcPct val="105000"/>
-              </a:lnSpc>
-              <a:buNone/>
-            </a:pPr>
-            <a:r>
-              <a:rPr lang="en-US" sz="1150" dirty="0">
-                <a:solidFill>
-                  <a:srgbClr val="E8ECEF"/>
-                </a:solidFill>
-                <a:latin typeface="Courier New" pitchFamily="34" charset="0"/>
-                <a:ea typeface="Courier New" pitchFamily="34" charset="-122"/>
-                <a:cs typeface="Courier New" pitchFamily="34" charset="-120"/>
-              </a:rPr>
-              <a:t>.</a:t>
-            </a:r>
-            <a:pPr indent="0" marL="0">
-              <a:lnSpc>
-                <a:spcPct val="105000"/>
-              </a:lnSpc>
-              <a:buNone/>
-            </a:pPr>
-            <a:r>
-              <a:rPr lang="en-US" sz="1150" dirty="0">
-                <a:solidFill>
-                  <a:srgbClr val="E8ECEF"/>
-                </a:solidFill>
-                <a:latin typeface="Courier New" pitchFamily="34" charset="0"/>
-                <a:ea typeface="Courier New" pitchFamily="34" charset="-122"/>
-                <a:cs typeface="Courier New" pitchFamily="34" charset="-120"/>
-              </a:rPr>
-              <a:t>char</a:t>
-            </a:r>
-            <a:pPr indent="0" marL="0">
-              <a:lnSpc>
-                <a:spcPct val="105000"/>
-              </a:lnSpc>
-              <a:buNone/>
-            </a:pPr>
-            <a:r>
-              <a:rPr lang="en-US" sz="1150" dirty="0">
-                <a:solidFill>
-                  <a:srgbClr val="E8ECEF"/>
+                  <a:srgbClr val="CCCCCC"/>
+                </a:solidFill>
+                <a:latin typeface="Courier New" pitchFamily="34" charset="0"/>
+                <a:ea typeface="Courier New" pitchFamily="34" charset="-122"/>
+                <a:cs typeface="Courier New" pitchFamily="34" charset="-120"/>
+              </a:rPr>
+              <a:t>   </a:t>
+            </a:r>
+            <a:pPr indent="0" marL="0">
+              <a:lnSpc>
+                <a:spcPct val="105000"/>
+              </a:lnSpc>
+              <a:buNone/>
+            </a:pPr>
+            <a:r>
+              <a:rPr lang="en-US" sz="1150" dirty="0">
+                <a:solidFill>
+                  <a:srgbClr val="CCCCCC"/>
+                </a:solidFill>
+                <a:latin typeface="Courier New" pitchFamily="34" charset="0"/>
+                <a:ea typeface="Courier New" pitchFamily="34" charset="-122"/>
+                <a:cs typeface="Courier New" pitchFamily="34" charset="-120"/>
+              </a:rPr>
+              <a:t>:</a:t>
+            </a:r>
+            <a:pPr indent="0" marL="0">
+              <a:lnSpc>
+                <a:spcPct val="105000"/>
+              </a:lnSpc>
+              <a:buNone/>
+            </a:pPr>
+            <a:r>
+              <a:rPr lang="en-US" sz="1150" dirty="0">
+                <a:solidFill>
+                  <a:srgbClr val="CCCCCC"/>
+                </a:solidFill>
+                <a:latin typeface="Courier New" pitchFamily="34" charset="0"/>
+                <a:ea typeface="Courier New" pitchFamily="34" charset="-122"/>
+                <a:cs typeface="Courier New" pitchFamily="34" charset="-120"/>
+              </a:rPr>
+              <a:t> </a:t>
+            </a:r>
+            <a:pPr indent="0" marL="0">
+              <a:lnSpc>
+                <a:spcPct val="105000"/>
+              </a:lnSpc>
+              <a:buNone/>
+            </a:pPr>
+            <a:r>
+              <a:rPr lang="en-US" sz="1150" dirty="0">
+                <a:solidFill>
+                  <a:srgbClr val="4EC9B0"/>
+                </a:solidFill>
+                <a:latin typeface="Courier New" pitchFamily="34" charset="0"/>
+                <a:ea typeface="Courier New" pitchFamily="34" charset="-122"/>
+                <a:cs typeface="Courier New" pitchFamily="34" charset="-120"/>
+              </a:rPr>
+              <a:t>abap.char</a:t>
+            </a:r>
+            <a:pPr indent="0" marL="0">
+              <a:lnSpc>
+                <a:spcPct val="105000"/>
+              </a:lnSpc>
+              <a:buNone/>
+            </a:pPr>
+            <a:r>
+              <a:rPr lang="en-US" sz="1150" dirty="0">
+                <a:solidFill>
+                  <a:srgbClr val="CCCCCC"/>
                 </a:solidFill>
                 <a:latin typeface="Courier New" pitchFamily="34" charset="0"/>
                 <a:ea typeface="Courier New" pitchFamily="34" charset="-122"/>
@@ -17288,7 +18317,7 @@
             <a:r>
               <a:rPr lang="en-US" sz="1150" dirty="0">
                 <a:solidFill>
-                  <a:srgbClr val="FF9F80"/>
+                  <a:srgbClr val="B5CEA8"/>
                 </a:solidFill>
                 <a:latin typeface="Courier New" pitchFamily="34" charset="0"/>
                 <a:ea typeface="Courier New" pitchFamily="34" charset="-122"/>
@@ -17305,24 +18334,41 @@
             <a:r>
               <a:rPr lang="en-US" sz="1150" dirty="0">
                 <a:solidFill>
-                  <a:srgbClr val="E8ECEF"/>
-                </a:solidFill>
-                <a:latin typeface="Courier New" pitchFamily="34" charset="0"/>
-                <a:ea typeface="Courier New" pitchFamily="34" charset="-122"/>
-                <a:cs typeface="Courier New" pitchFamily="34" charset="-120"/>
-              </a:rPr>
-              <a:t>) </a:t>
-            </a:r>
-            <a:pPr indent="0" marL="0">
-              <a:lnSpc>
-                <a:spcPct val="105000"/>
-              </a:lnSpc>
-              <a:buNone/>
-            </a:pPr>
-            <a:r>
-              <a:rPr lang="en-US" sz="1150" dirty="0">
-                <a:solidFill>
-                  <a:srgbClr val="4DB1FF"/>
+                  <a:srgbClr val="CCCCCC"/>
+                </a:solidFill>
+                <a:latin typeface="Courier New" pitchFamily="34" charset="0"/>
+                <a:ea typeface="Courier New" pitchFamily="34" charset="-122"/>
+                <a:cs typeface="Courier New" pitchFamily="34" charset="-120"/>
+              </a:rPr>
+              <a:t>)</a:t>
+            </a:r>
+            <a:pPr indent="0" marL="0">
+              <a:lnSpc>
+                <a:spcPct val="105000"/>
+              </a:lnSpc>
+              <a:buNone/>
+            </a:pPr>
+            <a:r>
+              <a:rPr lang="en-US" sz="1150" dirty="0">
+                <a:solidFill>
+                  <a:srgbClr val="CCCCCC"/>
+                </a:solidFill>
+                <a:latin typeface="Courier New" pitchFamily="34" charset="0"/>
+                <a:ea typeface="Courier New" pitchFamily="34" charset="-122"/>
+                <a:cs typeface="Courier New" pitchFamily="34" charset="-120"/>
+              </a:rPr>
+              <a:t> </a:t>
+            </a:r>
+            <a:pPr indent="0" marL="0">
+              <a:lnSpc>
+                <a:spcPct val="105000"/>
+              </a:lnSpc>
+              <a:buNone/>
+            </a:pPr>
+            <a:r>
+              <a:rPr lang="en-US" sz="1150" dirty="0">
+                <a:solidFill>
+                  <a:srgbClr val="569CD6"/>
                 </a:solidFill>
                 <a:latin typeface="Courier New" pitchFamily="34" charset="0"/>
                 <a:ea typeface="Courier New" pitchFamily="34" charset="-122"/>
@@ -17339,7 +18385,7 @@
             <a:r>
               <a:rPr lang="en-US" sz="1150" dirty="0">
                 <a:solidFill>
-                  <a:srgbClr val="E8ECEF"/>
+                  <a:srgbClr val="CCCCCC"/>
                 </a:solidFill>
                 <a:latin typeface="Courier New" pitchFamily="34" charset="0"/>
                 <a:ea typeface="Courier New" pitchFamily="34" charset="-122"/>
@@ -17356,7 +18402,7 @@
             <a:r>
               <a:rPr lang="en-US" sz="1150" dirty="0">
                 <a:solidFill>
-                  <a:srgbClr val="4DB1FF"/>
+                  <a:srgbClr val="569CD6"/>
                 </a:solidFill>
                 <a:latin typeface="Courier New" pitchFamily="34" charset="0"/>
                 <a:ea typeface="Courier New" pitchFamily="34" charset="-122"/>
@@ -17373,7 +18419,7 @@
             <a:r>
               <a:rPr lang="en-US" sz="1150" dirty="0">
                 <a:solidFill>
-                  <a:srgbClr val="E8ECEF"/>
+                  <a:srgbClr val="CCCCCC"/>
                 </a:solidFill>
                 <a:latin typeface="Courier New" pitchFamily="34" charset="0"/>
                 <a:ea typeface="Courier New" pitchFamily="34" charset="-122"/>
@@ -17393,7 +18439,24 @@
             <a:r>
               <a:rPr lang="en-US" sz="1150" dirty="0">
                 <a:solidFill>
-                  <a:srgbClr val="E8ECEF"/>
+                  <a:srgbClr val="6E7681"/>
+                </a:solidFill>
+                <a:latin typeface="Courier New" pitchFamily="34" charset="0"/>
+                <a:ea typeface="Courier New" pitchFamily="34" charset="-122"/>
+                <a:cs typeface="Courier New" pitchFamily="34" charset="-120"/>
+              </a:rPr>
+              <a:t> 4  </a:t>
+            </a:r>
+            <a:pPr indent="0" marL="0">
+              <a:lnSpc>
+                <a:spcPct val="105000"/>
+              </a:lnSpc>
+              <a:buNone/>
+            </a:pPr>
+            <a:r>
+              <a:rPr lang="en-US" sz="1150" dirty="0">
+                <a:solidFill>
+                  <a:srgbClr val="CCCCCC"/>
                 </a:solidFill>
                 <a:latin typeface="Courier New" pitchFamily="34" charset="0"/>
                 <a:ea typeface="Courier New" pitchFamily="34" charset="-122"/>
@@ -17410,7 +18473,7 @@
             <a:r>
               <a:rPr lang="en-US" sz="1150" dirty="0">
                 <a:solidFill>
-                  <a:srgbClr val="4DB1FF"/>
+                  <a:srgbClr val="569CD6"/>
                 </a:solidFill>
                 <a:latin typeface="Courier New" pitchFamily="34" charset="0"/>
                 <a:ea typeface="Courier New" pitchFamily="34" charset="-122"/>
@@ -17427,7 +18490,7 @@
             <a:r>
               <a:rPr lang="en-US" sz="1150" dirty="0">
                 <a:solidFill>
-                  <a:srgbClr val="E8ECEF"/>
+                  <a:srgbClr val="CCCCCC"/>
                 </a:solidFill>
                 <a:latin typeface="Courier New" pitchFamily="34" charset="0"/>
                 <a:ea typeface="Courier New" pitchFamily="34" charset="-122"/>
@@ -17444,7 +18507,7 @@
             <a:r>
               <a:rPr lang="en-US" sz="1150" dirty="0">
                 <a:solidFill>
-                  <a:srgbClr val="E8ECEF"/>
+                  <a:srgbClr val="CCCCCC"/>
                 </a:solidFill>
                 <a:latin typeface="Courier New" pitchFamily="34" charset="0"/>
                 <a:ea typeface="Courier New" pitchFamily="34" charset="-122"/>
@@ -17461,75 +18524,75 @@
             <a:r>
               <a:rPr lang="en-US" sz="1150" dirty="0">
                 <a:solidFill>
-                  <a:srgbClr val="E8ECEF"/>
-                </a:solidFill>
-                <a:latin typeface="Courier New" pitchFamily="34" charset="0"/>
-                <a:ea typeface="Courier New" pitchFamily="34" charset="-122"/>
-                <a:cs typeface="Courier New" pitchFamily="34" charset="-120"/>
-              </a:rPr>
-              <a:t>  : </a:t>
-            </a:r>
-            <a:pPr indent="0" marL="0">
-              <a:lnSpc>
-                <a:spcPct val="105000"/>
-              </a:lnSpc>
-              <a:buNone/>
-            </a:pPr>
-            <a:r>
-              <a:rPr lang="en-US" sz="1150" dirty="0">
-                <a:solidFill>
-                  <a:srgbClr val="E8ECEF"/>
-                </a:solidFill>
-                <a:latin typeface="Courier New" pitchFamily="34" charset="0"/>
-                <a:ea typeface="Courier New" pitchFamily="34" charset="-122"/>
-                <a:cs typeface="Courier New" pitchFamily="34" charset="-120"/>
-              </a:rPr>
-              <a:t>abap</a:t>
-            </a:r>
-            <a:pPr indent="0" marL="0">
-              <a:lnSpc>
-                <a:spcPct val="105000"/>
-              </a:lnSpc>
-              <a:buNone/>
-            </a:pPr>
-            <a:r>
-              <a:rPr lang="en-US" sz="1150" dirty="0">
-                <a:solidFill>
-                  <a:srgbClr val="E8ECEF"/>
-                </a:solidFill>
-                <a:latin typeface="Courier New" pitchFamily="34" charset="0"/>
-                <a:ea typeface="Courier New" pitchFamily="34" charset="-122"/>
-                <a:cs typeface="Courier New" pitchFamily="34" charset="-120"/>
-              </a:rPr>
-              <a:t>.</a:t>
-            </a:r>
-            <a:pPr indent="0" marL="0">
-              <a:lnSpc>
-                <a:spcPct val="105000"/>
-              </a:lnSpc>
-              <a:buNone/>
-            </a:pPr>
-            <a:r>
-              <a:rPr lang="en-US" sz="1150" dirty="0">
-                <a:solidFill>
-                  <a:srgbClr val="E8ECEF"/>
-                </a:solidFill>
-                <a:latin typeface="Courier New" pitchFamily="34" charset="0"/>
-                <a:ea typeface="Courier New" pitchFamily="34" charset="-122"/>
-                <a:cs typeface="Courier New" pitchFamily="34" charset="-120"/>
-              </a:rPr>
-              <a:t>char</a:t>
-            </a:r>
-            <a:pPr indent="0" marL="0">
-              <a:lnSpc>
-                <a:spcPct val="105000"/>
-              </a:lnSpc>
-              <a:buNone/>
-            </a:pPr>
-            <a:r>
-              <a:rPr lang="en-US" sz="1150" dirty="0">
-                <a:solidFill>
-                  <a:srgbClr val="E8ECEF"/>
+                  <a:srgbClr val="CCCCCC"/>
+                </a:solidFill>
+                <a:latin typeface="Courier New" pitchFamily="34" charset="0"/>
+                <a:ea typeface="Courier New" pitchFamily="34" charset="-122"/>
+                <a:cs typeface="Courier New" pitchFamily="34" charset="-120"/>
+              </a:rPr>
+              <a:t>  </a:t>
+            </a:r>
+            <a:pPr indent="0" marL="0">
+              <a:lnSpc>
+                <a:spcPct val="105000"/>
+              </a:lnSpc>
+              <a:buNone/>
+            </a:pPr>
+            <a:r>
+              <a:rPr lang="en-US" sz="1150" dirty="0">
+                <a:solidFill>
+                  <a:srgbClr val="CCCCCC"/>
+                </a:solidFill>
+                <a:latin typeface="Courier New" pitchFamily="34" charset="0"/>
+                <a:ea typeface="Courier New" pitchFamily="34" charset="-122"/>
+                <a:cs typeface="Courier New" pitchFamily="34" charset="-120"/>
+              </a:rPr>
+              <a:t>:</a:t>
+            </a:r>
+            <a:pPr indent="0" marL="0">
+              <a:lnSpc>
+                <a:spcPct val="105000"/>
+              </a:lnSpc>
+              <a:buNone/>
+            </a:pPr>
+            <a:r>
+              <a:rPr lang="en-US" sz="1150" dirty="0">
+                <a:solidFill>
+                  <a:srgbClr val="CCCCCC"/>
+                </a:solidFill>
+                <a:latin typeface="Courier New" pitchFamily="34" charset="0"/>
+                <a:ea typeface="Courier New" pitchFamily="34" charset="-122"/>
+                <a:cs typeface="Courier New" pitchFamily="34" charset="-120"/>
+              </a:rPr>
+              <a:t> </a:t>
+            </a:r>
+            <a:pPr indent="0" marL="0">
+              <a:lnSpc>
+                <a:spcPct val="105000"/>
+              </a:lnSpc>
+              <a:buNone/>
+            </a:pPr>
+            <a:r>
+              <a:rPr lang="en-US" sz="1150" dirty="0">
+                <a:solidFill>
+                  <a:srgbClr val="4EC9B0"/>
+                </a:solidFill>
+                <a:latin typeface="Courier New" pitchFamily="34" charset="0"/>
+                <a:ea typeface="Courier New" pitchFamily="34" charset="-122"/>
+                <a:cs typeface="Courier New" pitchFamily="34" charset="-120"/>
+              </a:rPr>
+              <a:t>abap.char</a:t>
+            </a:r>
+            <a:pPr indent="0" marL="0">
+              <a:lnSpc>
+                <a:spcPct val="105000"/>
+              </a:lnSpc>
+              <a:buNone/>
+            </a:pPr>
+            <a:r>
+              <a:rPr lang="en-US" sz="1150" dirty="0">
+                <a:solidFill>
+                  <a:srgbClr val="CCCCCC"/>
                 </a:solidFill>
                 <a:latin typeface="Courier New" pitchFamily="34" charset="0"/>
                 <a:ea typeface="Courier New" pitchFamily="34" charset="-122"/>
@@ -17546,7 +18609,7 @@
             <a:r>
               <a:rPr lang="en-US" sz="1150" dirty="0">
                 <a:solidFill>
-                  <a:srgbClr val="FF9F80"/>
+                  <a:srgbClr val="B5CEA8"/>
                 </a:solidFill>
                 <a:latin typeface="Courier New" pitchFamily="34" charset="0"/>
                 <a:ea typeface="Courier New" pitchFamily="34" charset="-122"/>
@@ -17563,24 +18626,41 @@
             <a:r>
               <a:rPr lang="en-US" sz="1150" dirty="0">
                 <a:solidFill>
-                  <a:srgbClr val="E8ECEF"/>
-                </a:solidFill>
-                <a:latin typeface="Courier New" pitchFamily="34" charset="0"/>
-                <a:ea typeface="Courier New" pitchFamily="34" charset="-122"/>
-                <a:cs typeface="Courier New" pitchFamily="34" charset="-120"/>
-              </a:rPr>
-              <a:t>) </a:t>
-            </a:r>
-            <a:pPr indent="0" marL="0">
-              <a:lnSpc>
-                <a:spcPct val="105000"/>
-              </a:lnSpc>
-              <a:buNone/>
-            </a:pPr>
-            <a:r>
-              <a:rPr lang="en-US" sz="1150" dirty="0">
-                <a:solidFill>
-                  <a:srgbClr val="4DB1FF"/>
+                  <a:srgbClr val="CCCCCC"/>
+                </a:solidFill>
+                <a:latin typeface="Courier New" pitchFamily="34" charset="0"/>
+                <a:ea typeface="Courier New" pitchFamily="34" charset="-122"/>
+                <a:cs typeface="Courier New" pitchFamily="34" charset="-120"/>
+              </a:rPr>
+              <a:t>)</a:t>
+            </a:r>
+            <a:pPr indent="0" marL="0">
+              <a:lnSpc>
+                <a:spcPct val="105000"/>
+              </a:lnSpc>
+              <a:buNone/>
+            </a:pPr>
+            <a:r>
+              <a:rPr lang="en-US" sz="1150" dirty="0">
+                <a:solidFill>
+                  <a:srgbClr val="CCCCCC"/>
+                </a:solidFill>
+                <a:latin typeface="Courier New" pitchFamily="34" charset="0"/>
+                <a:ea typeface="Courier New" pitchFamily="34" charset="-122"/>
+                <a:cs typeface="Courier New" pitchFamily="34" charset="-120"/>
+              </a:rPr>
+              <a:t> </a:t>
+            </a:r>
+            <a:pPr indent="0" marL="0">
+              <a:lnSpc>
+                <a:spcPct val="105000"/>
+              </a:lnSpc>
+              <a:buNone/>
+            </a:pPr>
+            <a:r>
+              <a:rPr lang="en-US" sz="1150" dirty="0">
+                <a:solidFill>
+                  <a:srgbClr val="569CD6"/>
                 </a:solidFill>
                 <a:latin typeface="Courier New" pitchFamily="34" charset="0"/>
                 <a:ea typeface="Courier New" pitchFamily="34" charset="-122"/>
@@ -17597,7 +18677,7 @@
             <a:r>
               <a:rPr lang="en-US" sz="1150" dirty="0">
                 <a:solidFill>
-                  <a:srgbClr val="E8ECEF"/>
+                  <a:srgbClr val="CCCCCC"/>
                 </a:solidFill>
                 <a:latin typeface="Courier New" pitchFamily="34" charset="0"/>
                 <a:ea typeface="Courier New" pitchFamily="34" charset="-122"/>
@@ -17614,7 +18694,7 @@
             <a:r>
               <a:rPr lang="en-US" sz="1150" dirty="0">
                 <a:solidFill>
-                  <a:srgbClr val="4DB1FF"/>
+                  <a:srgbClr val="569CD6"/>
                 </a:solidFill>
                 <a:latin typeface="Courier New" pitchFamily="34" charset="0"/>
                 <a:ea typeface="Courier New" pitchFamily="34" charset="-122"/>
@@ -17631,7 +18711,7 @@
             <a:r>
               <a:rPr lang="en-US" sz="1150" dirty="0">
                 <a:solidFill>
-                  <a:srgbClr val="E8ECEF"/>
+                  <a:srgbClr val="CCCCCC"/>
                 </a:solidFill>
                 <a:latin typeface="Courier New" pitchFamily="34" charset="0"/>
                 <a:ea typeface="Courier New" pitchFamily="34" charset="-122"/>
@@ -17651,7 +18731,24 @@
             <a:r>
               <a:rPr lang="en-US" sz="1150" dirty="0">
                 <a:solidFill>
-                  <a:srgbClr val="E8ECEF"/>
+                  <a:srgbClr val="6E7681"/>
+                </a:solidFill>
+                <a:latin typeface="Courier New" pitchFamily="34" charset="0"/>
+                <a:ea typeface="Courier New" pitchFamily="34" charset="-122"/>
+                <a:cs typeface="Courier New" pitchFamily="34" charset="-120"/>
+              </a:rPr>
+              <a:t> 5  </a:t>
+            </a:r>
+            <a:pPr indent="0" marL="0">
+              <a:lnSpc>
+                <a:spcPct val="105000"/>
+              </a:lnSpc>
+              <a:buNone/>
+            </a:pPr>
+            <a:r>
+              <a:rPr lang="en-US" sz="1150" dirty="0">
+                <a:solidFill>
+                  <a:srgbClr val="CCCCCC"/>
                 </a:solidFill>
                 <a:latin typeface="Courier New" pitchFamily="34" charset="0"/>
                 <a:ea typeface="Courier New" pitchFamily="34" charset="-122"/>
@@ -17668,7 +18765,7 @@
             <a:r>
               <a:rPr lang="en-US" sz="1150" dirty="0">
                 <a:solidFill>
-                  <a:srgbClr val="E8ECEF"/>
+                  <a:srgbClr val="CCCCCC"/>
                 </a:solidFill>
                 <a:latin typeface="Courier New" pitchFamily="34" charset="0"/>
                 <a:ea typeface="Courier New" pitchFamily="34" charset="-122"/>
@@ -17685,75 +18782,75 @@
             <a:r>
               <a:rPr lang="en-US" sz="1150" dirty="0">
                 <a:solidFill>
-                  <a:srgbClr val="E8ECEF"/>
-                </a:solidFill>
-                <a:latin typeface="Courier New" pitchFamily="34" charset="0"/>
-                <a:ea typeface="Courier New" pitchFamily="34" charset="-122"/>
-                <a:cs typeface="Courier New" pitchFamily="34" charset="-120"/>
-              </a:rPr>
-              <a:t>   : </a:t>
-            </a:r>
-            <a:pPr indent="0" marL="0">
-              <a:lnSpc>
-                <a:spcPct val="105000"/>
-              </a:lnSpc>
-              <a:buNone/>
-            </a:pPr>
-            <a:r>
-              <a:rPr lang="en-US" sz="1150" dirty="0">
-                <a:solidFill>
-                  <a:srgbClr val="E8ECEF"/>
-                </a:solidFill>
-                <a:latin typeface="Courier New" pitchFamily="34" charset="0"/>
-                <a:ea typeface="Courier New" pitchFamily="34" charset="-122"/>
-                <a:cs typeface="Courier New" pitchFamily="34" charset="-120"/>
-              </a:rPr>
-              <a:t>abap</a:t>
-            </a:r>
-            <a:pPr indent="0" marL="0">
-              <a:lnSpc>
-                <a:spcPct val="105000"/>
-              </a:lnSpc>
-              <a:buNone/>
-            </a:pPr>
-            <a:r>
-              <a:rPr lang="en-US" sz="1150" dirty="0">
-                <a:solidFill>
-                  <a:srgbClr val="E8ECEF"/>
-                </a:solidFill>
-                <a:latin typeface="Courier New" pitchFamily="34" charset="0"/>
-                <a:ea typeface="Courier New" pitchFamily="34" charset="-122"/>
-                <a:cs typeface="Courier New" pitchFamily="34" charset="-120"/>
-              </a:rPr>
-              <a:t>.</a:t>
-            </a:r>
-            <a:pPr indent="0" marL="0">
-              <a:lnSpc>
-                <a:spcPct val="105000"/>
-              </a:lnSpc>
-              <a:buNone/>
-            </a:pPr>
-            <a:r>
-              <a:rPr lang="en-US" sz="1150" dirty="0">
-                <a:solidFill>
-                  <a:srgbClr val="E8ECEF"/>
-                </a:solidFill>
-                <a:latin typeface="Courier New" pitchFamily="34" charset="0"/>
-                <a:ea typeface="Courier New" pitchFamily="34" charset="-122"/>
-                <a:cs typeface="Courier New" pitchFamily="34" charset="-120"/>
-              </a:rPr>
-              <a:t>char</a:t>
-            </a:r>
-            <a:pPr indent="0" marL="0">
-              <a:lnSpc>
-                <a:spcPct val="105000"/>
-              </a:lnSpc>
-              <a:buNone/>
-            </a:pPr>
-            <a:r>
-              <a:rPr lang="en-US" sz="1150" dirty="0">
-                <a:solidFill>
-                  <a:srgbClr val="E8ECEF"/>
+                  <a:srgbClr val="CCCCCC"/>
+                </a:solidFill>
+                <a:latin typeface="Courier New" pitchFamily="34" charset="0"/>
+                <a:ea typeface="Courier New" pitchFamily="34" charset="-122"/>
+                <a:cs typeface="Courier New" pitchFamily="34" charset="-120"/>
+              </a:rPr>
+              <a:t>   </a:t>
+            </a:r>
+            <a:pPr indent="0" marL="0">
+              <a:lnSpc>
+                <a:spcPct val="105000"/>
+              </a:lnSpc>
+              <a:buNone/>
+            </a:pPr>
+            <a:r>
+              <a:rPr lang="en-US" sz="1150" dirty="0">
+                <a:solidFill>
+                  <a:srgbClr val="CCCCCC"/>
+                </a:solidFill>
+                <a:latin typeface="Courier New" pitchFamily="34" charset="0"/>
+                <a:ea typeface="Courier New" pitchFamily="34" charset="-122"/>
+                <a:cs typeface="Courier New" pitchFamily="34" charset="-120"/>
+              </a:rPr>
+              <a:t>:</a:t>
+            </a:r>
+            <a:pPr indent="0" marL="0">
+              <a:lnSpc>
+                <a:spcPct val="105000"/>
+              </a:lnSpc>
+              <a:buNone/>
+            </a:pPr>
+            <a:r>
+              <a:rPr lang="en-US" sz="1150" dirty="0">
+                <a:solidFill>
+                  <a:srgbClr val="CCCCCC"/>
+                </a:solidFill>
+                <a:latin typeface="Courier New" pitchFamily="34" charset="0"/>
+                <a:ea typeface="Courier New" pitchFamily="34" charset="-122"/>
+                <a:cs typeface="Courier New" pitchFamily="34" charset="-120"/>
+              </a:rPr>
+              <a:t> </a:t>
+            </a:r>
+            <a:pPr indent="0" marL="0">
+              <a:lnSpc>
+                <a:spcPct val="105000"/>
+              </a:lnSpc>
+              <a:buNone/>
+            </a:pPr>
+            <a:r>
+              <a:rPr lang="en-US" sz="1150" dirty="0">
+                <a:solidFill>
+                  <a:srgbClr val="4EC9B0"/>
+                </a:solidFill>
+                <a:latin typeface="Courier New" pitchFamily="34" charset="0"/>
+                <a:ea typeface="Courier New" pitchFamily="34" charset="-122"/>
+                <a:cs typeface="Courier New" pitchFamily="34" charset="-120"/>
+              </a:rPr>
+              <a:t>abap.char</a:t>
+            </a:r>
+            <a:pPr indent="0" marL="0">
+              <a:lnSpc>
+                <a:spcPct val="105000"/>
+              </a:lnSpc>
+              <a:buNone/>
+            </a:pPr>
+            <a:r>
+              <a:rPr lang="en-US" sz="1150" dirty="0">
+                <a:solidFill>
+                  <a:srgbClr val="CCCCCC"/>
                 </a:solidFill>
                 <a:latin typeface="Courier New" pitchFamily="34" charset="0"/>
                 <a:ea typeface="Courier New" pitchFamily="34" charset="-122"/>
@@ -17770,7 +18867,7 @@
             <a:r>
               <a:rPr lang="en-US" sz="1150" dirty="0">
                 <a:solidFill>
-                  <a:srgbClr val="FF9F80"/>
+                  <a:srgbClr val="B5CEA8"/>
                 </a:solidFill>
                 <a:latin typeface="Courier New" pitchFamily="34" charset="0"/>
                 <a:ea typeface="Courier New" pitchFamily="34" charset="-122"/>
@@ -17787,7 +18884,7 @@
             <a:r>
               <a:rPr lang="en-US" sz="1150" dirty="0">
                 <a:solidFill>
-                  <a:srgbClr val="E8ECEF"/>
+                  <a:srgbClr val="CCCCCC"/>
                 </a:solidFill>
                 <a:latin typeface="Courier New" pitchFamily="34" charset="0"/>
                 <a:ea typeface="Courier New" pitchFamily="34" charset="-122"/>
@@ -17807,7 +18904,24 @@
             <a:r>
               <a:rPr lang="en-US" sz="1150" dirty="0">
                 <a:solidFill>
-                  <a:srgbClr val="E8ECEF"/>
+                  <a:srgbClr val="6E7681"/>
+                </a:solidFill>
+                <a:latin typeface="Courier New" pitchFamily="34" charset="0"/>
+                <a:ea typeface="Courier New" pitchFamily="34" charset="-122"/>
+                <a:cs typeface="Courier New" pitchFamily="34" charset="-120"/>
+              </a:rPr>
+              <a:t> 6  </a:t>
+            </a:r>
+            <a:pPr indent="0" marL="0">
+              <a:lnSpc>
+                <a:spcPct val="105000"/>
+              </a:lnSpc>
+              <a:buNone/>
+            </a:pPr>
+            <a:r>
+              <a:rPr lang="en-US" sz="1150" dirty="0">
+                <a:solidFill>
+                  <a:srgbClr val="CCCCCC"/>
                 </a:solidFill>
                 <a:latin typeface="Courier New" pitchFamily="34" charset="0"/>
                 <a:ea typeface="Courier New" pitchFamily="34" charset="-122"/>
@@ -17824,7 +18938,7 @@
             <a:r>
               <a:rPr lang="en-US" sz="1150" dirty="0">
                 <a:solidFill>
-                  <a:srgbClr val="E8ECEF"/>
+                  <a:srgbClr val="CCCCCC"/>
                 </a:solidFill>
                 <a:latin typeface="Courier New" pitchFamily="34" charset="0"/>
                 <a:ea typeface="Courier New" pitchFamily="34" charset="-122"/>
@@ -17841,75 +18955,75 @@
             <a:r>
               <a:rPr lang="en-US" sz="1150" dirty="0">
                 <a:solidFill>
-                  <a:srgbClr val="E8ECEF"/>
-                </a:solidFill>
-                <a:latin typeface="Courier New" pitchFamily="34" charset="0"/>
-                <a:ea typeface="Courier New" pitchFamily="34" charset="-122"/>
-                <a:cs typeface="Courier New" pitchFamily="34" charset="-120"/>
-              </a:rPr>
-              <a:t> : </a:t>
-            </a:r>
-            <a:pPr indent="0" marL="0">
-              <a:lnSpc>
-                <a:spcPct val="105000"/>
-              </a:lnSpc>
-              <a:buNone/>
-            </a:pPr>
-            <a:r>
-              <a:rPr lang="en-US" sz="1150" dirty="0">
-                <a:solidFill>
-                  <a:srgbClr val="E8ECEF"/>
-                </a:solidFill>
-                <a:latin typeface="Courier New" pitchFamily="34" charset="0"/>
-                <a:ea typeface="Courier New" pitchFamily="34" charset="-122"/>
-                <a:cs typeface="Courier New" pitchFamily="34" charset="-120"/>
-              </a:rPr>
-              <a:t>abap</a:t>
-            </a:r>
-            <a:pPr indent="0" marL="0">
-              <a:lnSpc>
-                <a:spcPct val="105000"/>
-              </a:lnSpc>
-              <a:buNone/>
-            </a:pPr>
-            <a:r>
-              <a:rPr lang="en-US" sz="1150" dirty="0">
-                <a:solidFill>
-                  <a:srgbClr val="E8ECEF"/>
-                </a:solidFill>
-                <a:latin typeface="Courier New" pitchFamily="34" charset="0"/>
-                <a:ea typeface="Courier New" pitchFamily="34" charset="-122"/>
-                <a:cs typeface="Courier New" pitchFamily="34" charset="-120"/>
-              </a:rPr>
-              <a:t>.</a:t>
-            </a:r>
-            <a:pPr indent="0" marL="0">
-              <a:lnSpc>
-                <a:spcPct val="105000"/>
-              </a:lnSpc>
-              <a:buNone/>
-            </a:pPr>
-            <a:r>
-              <a:rPr lang="en-US" sz="1150" dirty="0">
-                <a:solidFill>
-                  <a:srgbClr val="E8ECEF"/>
-                </a:solidFill>
-                <a:latin typeface="Courier New" pitchFamily="34" charset="0"/>
-                <a:ea typeface="Courier New" pitchFamily="34" charset="-122"/>
-                <a:cs typeface="Courier New" pitchFamily="34" charset="-120"/>
-              </a:rPr>
-              <a:t>int1</a:t>
-            </a:r>
-            <a:pPr indent="0" marL="0">
-              <a:lnSpc>
-                <a:spcPct val="105000"/>
-              </a:lnSpc>
-              <a:buNone/>
-            </a:pPr>
-            <a:r>
-              <a:rPr lang="en-US" sz="1150" dirty="0">
-                <a:solidFill>
-                  <a:srgbClr val="E8ECEF"/>
+                  <a:srgbClr val="CCCCCC"/>
+                </a:solidFill>
+                <a:latin typeface="Courier New" pitchFamily="34" charset="0"/>
+                <a:ea typeface="Courier New" pitchFamily="34" charset="-122"/>
+                <a:cs typeface="Courier New" pitchFamily="34" charset="-120"/>
+              </a:rPr>
+              <a:t> </a:t>
+            </a:r>
+            <a:pPr indent="0" marL="0">
+              <a:lnSpc>
+                <a:spcPct val="105000"/>
+              </a:lnSpc>
+              <a:buNone/>
+            </a:pPr>
+            <a:r>
+              <a:rPr lang="en-US" sz="1150" dirty="0">
+                <a:solidFill>
+                  <a:srgbClr val="CCCCCC"/>
+                </a:solidFill>
+                <a:latin typeface="Courier New" pitchFamily="34" charset="0"/>
+                <a:ea typeface="Courier New" pitchFamily="34" charset="-122"/>
+                <a:cs typeface="Courier New" pitchFamily="34" charset="-120"/>
+              </a:rPr>
+              <a:t>:</a:t>
+            </a:r>
+            <a:pPr indent="0" marL="0">
+              <a:lnSpc>
+                <a:spcPct val="105000"/>
+              </a:lnSpc>
+              <a:buNone/>
+            </a:pPr>
+            <a:r>
+              <a:rPr lang="en-US" sz="1150" dirty="0">
+                <a:solidFill>
+                  <a:srgbClr val="CCCCCC"/>
+                </a:solidFill>
+                <a:latin typeface="Courier New" pitchFamily="34" charset="0"/>
+                <a:ea typeface="Courier New" pitchFamily="34" charset="-122"/>
+                <a:cs typeface="Courier New" pitchFamily="34" charset="-120"/>
+              </a:rPr>
+              <a:t> </a:t>
+            </a:r>
+            <a:pPr indent="0" marL="0">
+              <a:lnSpc>
+                <a:spcPct val="105000"/>
+              </a:lnSpc>
+              <a:buNone/>
+            </a:pPr>
+            <a:r>
+              <a:rPr lang="en-US" sz="1150" dirty="0">
+                <a:solidFill>
+                  <a:srgbClr val="4EC9B0"/>
+                </a:solidFill>
+                <a:latin typeface="Courier New" pitchFamily="34" charset="0"/>
+                <a:ea typeface="Courier New" pitchFamily="34" charset="-122"/>
+                <a:cs typeface="Courier New" pitchFamily="34" charset="-120"/>
+              </a:rPr>
+              <a:t>abap.int1</a:t>
+            </a:r>
+            <a:pPr indent="0" marL="0">
+              <a:lnSpc>
+                <a:spcPct val="105000"/>
+              </a:lnSpc>
+              <a:buNone/>
+            </a:pPr>
+            <a:r>
+              <a:rPr lang="en-US" sz="1150" dirty="0">
+                <a:solidFill>
+                  <a:srgbClr val="CCCCCC"/>
                 </a:solidFill>
                 <a:latin typeface="Courier New" pitchFamily="34" charset="0"/>
                 <a:ea typeface="Courier New" pitchFamily="34" charset="-122"/>
@@ -17929,7 +19043,24 @@
             <a:r>
               <a:rPr lang="en-US" sz="1150" dirty="0">
                 <a:solidFill>
-                  <a:srgbClr val="E8ECEF"/>
+                  <a:srgbClr val="6E7681"/>
+                </a:solidFill>
+                <a:latin typeface="Courier New" pitchFamily="34" charset="0"/>
+                <a:ea typeface="Courier New" pitchFamily="34" charset="-122"/>
+                <a:cs typeface="Courier New" pitchFamily="34" charset="-120"/>
+              </a:rPr>
+              <a:t> 7  </a:t>
+            </a:r>
+            <a:pPr indent="0" marL="0">
+              <a:lnSpc>
+                <a:spcPct val="105000"/>
+              </a:lnSpc>
+              <a:buNone/>
+            </a:pPr>
+            <a:r>
+              <a:rPr lang="en-US" sz="1150" dirty="0">
+                <a:solidFill>
+                  <a:srgbClr val="CCCCCC"/>
                 </a:solidFill>
                 <a:latin typeface="Courier New" pitchFamily="34" charset="0"/>
                 <a:ea typeface="Courier New" pitchFamily="34" charset="-122"/>
@@ -17946,7 +19077,7 @@
             <a:r>
               <a:rPr lang="en-US" sz="1150" dirty="0">
                 <a:solidFill>
-                  <a:srgbClr val="E8ECEF"/>
+                  <a:srgbClr val="CCCCCC"/>
                 </a:solidFill>
                 <a:latin typeface="Courier New" pitchFamily="34" charset="0"/>
                 <a:ea typeface="Courier New" pitchFamily="34" charset="-122"/>
@@ -17963,75 +19094,75 @@
             <a:r>
               <a:rPr lang="en-US" sz="1150" dirty="0">
                 <a:solidFill>
-                  <a:srgbClr val="E8ECEF"/>
-                </a:solidFill>
-                <a:latin typeface="Courier New" pitchFamily="34" charset="0"/>
-                <a:ea typeface="Courier New" pitchFamily="34" charset="-122"/>
-                <a:cs typeface="Courier New" pitchFamily="34" charset="-120"/>
-              </a:rPr>
-              <a:t>       : </a:t>
-            </a:r>
-            <a:pPr indent="0" marL="0">
-              <a:lnSpc>
-                <a:spcPct val="105000"/>
-              </a:lnSpc>
-              <a:buNone/>
-            </a:pPr>
-            <a:r>
-              <a:rPr lang="en-US" sz="1150" dirty="0">
-                <a:solidFill>
-                  <a:srgbClr val="E8ECEF"/>
-                </a:solidFill>
-                <a:latin typeface="Courier New" pitchFamily="34" charset="0"/>
-                <a:ea typeface="Courier New" pitchFamily="34" charset="-122"/>
-                <a:cs typeface="Courier New" pitchFamily="34" charset="-120"/>
-              </a:rPr>
-              <a:t>abap</a:t>
-            </a:r>
-            <a:pPr indent="0" marL="0">
-              <a:lnSpc>
-                <a:spcPct val="105000"/>
-              </a:lnSpc>
-              <a:buNone/>
-            </a:pPr>
-            <a:r>
-              <a:rPr lang="en-US" sz="1150" dirty="0">
-                <a:solidFill>
-                  <a:srgbClr val="E8ECEF"/>
-                </a:solidFill>
-                <a:latin typeface="Courier New" pitchFamily="34" charset="0"/>
-                <a:ea typeface="Courier New" pitchFamily="34" charset="-122"/>
-                <a:cs typeface="Courier New" pitchFamily="34" charset="-120"/>
-              </a:rPr>
-              <a:t>.</a:t>
-            </a:r>
-            <a:pPr indent="0" marL="0">
-              <a:lnSpc>
-                <a:spcPct val="105000"/>
-              </a:lnSpc>
-              <a:buNone/>
-            </a:pPr>
-            <a:r>
-              <a:rPr lang="en-US" sz="1150" dirty="0">
-                <a:solidFill>
-                  <a:srgbClr val="E8ECEF"/>
-                </a:solidFill>
-                <a:latin typeface="Courier New" pitchFamily="34" charset="0"/>
-                <a:ea typeface="Courier New" pitchFamily="34" charset="-122"/>
-                <a:cs typeface="Courier New" pitchFamily="34" charset="-120"/>
-              </a:rPr>
-              <a:t>int2</a:t>
-            </a:r>
-            <a:pPr indent="0" marL="0">
-              <a:lnSpc>
-                <a:spcPct val="105000"/>
-              </a:lnSpc>
-              <a:buNone/>
-            </a:pPr>
-            <a:r>
-              <a:rPr lang="en-US" sz="1150" dirty="0">
-                <a:solidFill>
-                  <a:srgbClr val="E8ECEF"/>
+                  <a:srgbClr val="CCCCCC"/>
+                </a:solidFill>
+                <a:latin typeface="Courier New" pitchFamily="34" charset="0"/>
+                <a:ea typeface="Courier New" pitchFamily="34" charset="-122"/>
+                <a:cs typeface="Courier New" pitchFamily="34" charset="-120"/>
+              </a:rPr>
+              <a:t>       </a:t>
+            </a:r>
+            <a:pPr indent="0" marL="0">
+              <a:lnSpc>
+                <a:spcPct val="105000"/>
+              </a:lnSpc>
+              <a:buNone/>
+            </a:pPr>
+            <a:r>
+              <a:rPr lang="en-US" sz="1150" dirty="0">
+                <a:solidFill>
+                  <a:srgbClr val="CCCCCC"/>
+                </a:solidFill>
+                <a:latin typeface="Courier New" pitchFamily="34" charset="0"/>
+                <a:ea typeface="Courier New" pitchFamily="34" charset="-122"/>
+                <a:cs typeface="Courier New" pitchFamily="34" charset="-120"/>
+              </a:rPr>
+              <a:t>:</a:t>
+            </a:r>
+            <a:pPr indent="0" marL="0">
+              <a:lnSpc>
+                <a:spcPct val="105000"/>
+              </a:lnSpc>
+              <a:buNone/>
+            </a:pPr>
+            <a:r>
+              <a:rPr lang="en-US" sz="1150" dirty="0">
+                <a:solidFill>
+                  <a:srgbClr val="CCCCCC"/>
+                </a:solidFill>
+                <a:latin typeface="Courier New" pitchFamily="34" charset="0"/>
+                <a:ea typeface="Courier New" pitchFamily="34" charset="-122"/>
+                <a:cs typeface="Courier New" pitchFamily="34" charset="-120"/>
+              </a:rPr>
+              <a:t> </a:t>
+            </a:r>
+            <a:pPr indent="0" marL="0">
+              <a:lnSpc>
+                <a:spcPct val="105000"/>
+              </a:lnSpc>
+              <a:buNone/>
+            </a:pPr>
+            <a:r>
+              <a:rPr lang="en-US" sz="1150" dirty="0">
+                <a:solidFill>
+                  <a:srgbClr val="4EC9B0"/>
+                </a:solidFill>
+                <a:latin typeface="Courier New" pitchFamily="34" charset="0"/>
+                <a:ea typeface="Courier New" pitchFamily="34" charset="-122"/>
+                <a:cs typeface="Courier New" pitchFamily="34" charset="-120"/>
+              </a:rPr>
+              <a:t>abap.int2</a:t>
+            </a:r>
+            <a:pPr indent="0" marL="0">
+              <a:lnSpc>
+                <a:spcPct val="105000"/>
+              </a:lnSpc>
+              <a:buNone/>
+            </a:pPr>
+            <a:r>
+              <a:rPr lang="en-US" sz="1150" dirty="0">
+                <a:solidFill>
+                  <a:srgbClr val="CCCCCC"/>
                 </a:solidFill>
                 <a:latin typeface="Courier New" pitchFamily="34" charset="0"/>
                 <a:ea typeface="Courier New" pitchFamily="34" charset="-122"/>
@@ -18051,7 +19182,24 @@
             <a:r>
               <a:rPr lang="en-US" sz="1150" dirty="0">
                 <a:solidFill>
-                  <a:srgbClr val="E8ECEF"/>
+                  <a:srgbClr val="6E7681"/>
+                </a:solidFill>
+                <a:latin typeface="Courier New" pitchFamily="34" charset="0"/>
+                <a:ea typeface="Courier New" pitchFamily="34" charset="-122"/>
+                <a:cs typeface="Courier New" pitchFamily="34" charset="-120"/>
+              </a:rPr>
+              <a:t> 8  </a:t>
+            </a:r>
+            <a:pPr indent="0" marL="0">
+              <a:lnSpc>
+                <a:spcPct val="105000"/>
+              </a:lnSpc>
+              <a:buNone/>
+            </a:pPr>
+            <a:r>
+              <a:rPr lang="en-US" sz="1150" dirty="0">
+                <a:solidFill>
+                  <a:srgbClr val="CCCCCC"/>
                 </a:solidFill>
                 <a:latin typeface="Courier New" pitchFamily="34" charset="0"/>
                 <a:ea typeface="Courier New" pitchFamily="34" charset="-122"/>
@@ -18065,7 +19213,7 @@
       </p:sp>
       <p:sp>
         <p:nvSpPr>
-          <p:cNvPr id="9" name="Cartão"/>
+          <p:cNvPr id="13" name="Cartão"/>
           <p:cNvSpPr/>
           <p:nvPr/>
         </p:nvSpPr>
@@ -18094,7 +19242,7 @@
       </p:sp>
       <p:sp>
         <p:nvSpPr>
-          <p:cNvPr id="10" name="Text 7"/>
+          <p:cNvPr id="14" name="Text 11"/>
           <p:cNvSpPr txBox="1"/>
           <p:nvPr/>
         </p:nvSpPr>
@@ -18130,7 +19278,7 @@
       </p:sp>
       <p:sp>
         <p:nvSpPr>
-          <p:cNvPr id="11" name="Text 8"/>
+          <p:cNvPr id="15" name="Text 12"/>
           <p:cNvSpPr txBox="1"/>
           <p:nvPr/>
         </p:nvSpPr>
@@ -18245,7 +19393,7 @@
       </p:sp>
       <p:sp>
         <p:nvSpPr>
-          <p:cNvPr id="12" name="Cartão"/>
+          <p:cNvPr id="16" name="Cartão"/>
           <p:cNvSpPr/>
           <p:nvPr/>
         </p:nvSpPr>
@@ -18274,7 +19422,7 @@
       </p:sp>
       <p:sp>
         <p:nvSpPr>
-          <p:cNvPr id="13" name="Text 10"/>
+          <p:cNvPr id="17" name="Text 14"/>
           <p:cNvSpPr txBox="1"/>
           <p:nvPr/>
         </p:nvSpPr>
@@ -18313,7 +19461,7 @@
       </p:sp>
       <p:sp>
         <p:nvSpPr>
-          <p:cNvPr id="14" name="Status Aberto"/>
+          <p:cNvPr id="18" name="Status Aberto"/>
           <p:cNvSpPr/>
           <p:nvPr/>
         </p:nvSpPr>
@@ -18353,7 +19501,7 @@
       </p:sp>
       <p:sp>
         <p:nvSpPr>
-          <p:cNvPr id="15" name="Status Aguardando aprovação"/>
+          <p:cNvPr id="19" name="Status Aguardando aprovação"/>
           <p:cNvSpPr/>
           <p:nvPr/>
         </p:nvSpPr>
@@ -18393,7 +19541,7 @@
       </p:sp>
       <p:sp>
         <p:nvSpPr>
-          <p:cNvPr id="16" name="Status Processando reembolso"/>
+          <p:cNvPr id="20" name="Status Processando reembolso"/>
           <p:cNvSpPr/>
           <p:nvPr/>
         </p:nvSpPr>
@@ -18433,7 +19581,7 @@
       </p:sp>
       <p:sp>
         <p:nvSpPr>
-          <p:cNvPr id="17" name="Status Cancelado"/>
+          <p:cNvPr id="21" name="Status Cancelado"/>
           <p:cNvSpPr/>
           <p:nvPr/>
         </p:nvSpPr>
@@ -18473,7 +19621,7 @@
       </p:sp>
       <p:sp>
         <p:nvSpPr>
-          <p:cNvPr id="18" name="Status Finalizado"/>
+          <p:cNvPr id="22" name="Status Finalizado"/>
           <p:cNvSpPr/>
           <p:nvPr/>
         </p:nvSpPr>
@@ -18513,7 +19661,7 @@
       </p:sp>
       <p:sp>
         <p:nvSpPr>
-          <p:cNvPr id="19" name="Shape 16"/>
+          <p:cNvPr id="23" name="Shape 20"/>
           <p:cNvSpPr/>
           <p:nvPr/>
         </p:nvSpPr>
@@ -18536,7 +19684,7 @@
       </p:sp>
       <p:sp>
         <p:nvSpPr>
-          <p:cNvPr id="20" name="Text 17"/>
+          <p:cNvPr id="24" name="Text 21"/>
           <p:cNvSpPr txBox="1"/>
           <p:nvPr/>
         </p:nvSpPr>
@@ -18575,7 +19723,7 @@
       </p:sp>
       <p:sp>
         <p:nvSpPr>
-          <p:cNvPr id="21" name="Status Pendente"/>
+          <p:cNvPr id="25" name="Status Pendente"/>
           <p:cNvSpPr/>
           <p:nvPr/>
         </p:nvSpPr>
@@ -18615,7 +19763,7 @@
       </p:sp>
       <p:sp>
         <p:nvSpPr>
-          <p:cNvPr id="22" name="Status Aprovado"/>
+          <p:cNvPr id="26" name="Status Aprovado"/>
           <p:cNvSpPr/>
           <p:nvPr/>
         </p:nvSpPr>
@@ -18655,7 +19803,7 @@
       </p:sp>
       <p:sp>
         <p:nvSpPr>
-          <p:cNvPr id="23" name="Status Recusado"/>
+          <p:cNvPr id="27" name="Status Recusado"/>
           <p:cNvSpPr/>
           <p:nvPr/>
         </p:nvSpPr>
@@ -18695,7 +19843,7 @@
       </p:sp>
       <p:sp>
         <p:nvSpPr>
-          <p:cNvPr id="24" name="Status Devolvido"/>
+          <p:cNvPr id="28" name="Status Devolvido"/>
           <p:cNvSpPr/>
           <p:nvPr/>
         </p:nvSpPr>
@@ -18735,7 +19883,7 @@
       </p:sp>
       <p:sp>
         <p:nvSpPr>
-          <p:cNvPr id="25" name="Shape 22"/>
+          <p:cNvPr id="29" name="Shape 26"/>
           <p:cNvSpPr/>
           <p:nvPr/>
         </p:nvSpPr>
@@ -18758,7 +19906,7 @@
       </p:sp>
       <p:sp>
         <p:nvSpPr>
-          <p:cNvPr id="26" name="Text 23"/>
+          <p:cNvPr id="30" name="Text 27"/>
           <p:cNvSpPr txBox="1"/>
           <p:nvPr/>
         </p:nvSpPr>
@@ -18797,7 +19945,7 @@
       </p:sp>
       <p:sp>
         <p:nvSpPr>
-          <p:cNvPr id="27" name="Status Pendente"/>
+          <p:cNvPr id="31" name="Status Pendente"/>
           <p:cNvSpPr/>
           <p:nvPr/>
         </p:nvSpPr>
@@ -18837,7 +19985,7 @@
       </p:sp>
       <p:sp>
         <p:nvSpPr>
-          <p:cNvPr id="28" name="Status Aprovado"/>
+          <p:cNvPr id="32" name="Status Aprovado"/>
           <p:cNvSpPr/>
           <p:nvPr/>
         </p:nvSpPr>
@@ -18877,7 +20025,7 @@
       </p:sp>
       <p:sp>
         <p:nvSpPr>
-          <p:cNvPr id="29" name="Status Rejeitado"/>
+          <p:cNvPr id="33" name="Status Rejeitado"/>
           <p:cNvSpPr/>
           <p:nvPr/>
         </p:nvSpPr>
@@ -18917,7 +20065,7 @@
       </p:sp>
       <p:sp>
         <p:nvSpPr>
-          <p:cNvPr id="30" name="Shape 27"/>
+          <p:cNvPr id="34" name="Shape 31"/>
           <p:cNvSpPr/>
           <p:nvPr/>
         </p:nvSpPr>
@@ -18940,7 +20088,7 @@
       </p:sp>
       <p:sp>
         <p:nvSpPr>
-          <p:cNvPr id="31" name="Text 28"/>
+          <p:cNvPr id="35" name="Text 32"/>
           <p:cNvSpPr txBox="1"/>
           <p:nvPr/>
         </p:nvSpPr>
@@ -18979,7 +20127,7 @@
       </p:sp>
       <p:sp>
         <p:nvSpPr>
-          <p:cNvPr id="32" name="Status Sem estoque"/>
+          <p:cNvPr id="36" name="Status Sem estoque"/>
           <p:cNvSpPr/>
           <p:nvPr/>
         </p:nvSpPr>
@@ -19019,7 +20167,7 @@
       </p:sp>
       <p:sp>
         <p:nvSpPr>
-          <p:cNvPr id="33" name="Status Acabando"/>
+          <p:cNvPr id="37" name="Status Acabando"/>
           <p:cNvSpPr/>
           <p:nvPr/>
         </p:nvSpPr>
@@ -19059,7 +20207,7 @@
       </p:sp>
       <p:sp>
         <p:nvSpPr>
-          <p:cNvPr id="34" name="Status Em estoque"/>
+          <p:cNvPr id="38" name="Status Em estoque"/>
           <p:cNvSpPr/>
           <p:nvPr/>
         </p:nvSpPr>
